--- a/skatepark.pptx
+++ b/skatepark.pptx
@@ -3141,16 +3141,40 @@
           </a:p>
         </p:txBody>
       </p:sp>
-      <p:sp>
-        <p:nvSpPr>
-          <p:cNvPr id="3" name="Rectangle 2"/>
+      <p:pic>
+        <p:nvPicPr>
+          <p:cNvPr id="3" name="Picture 2" descr="hero.png"/>
+          <p:cNvPicPr>
+            <a:picLocks noChangeAspect="1"/>
+          </p:cNvPicPr>
+          <p:nvPr/>
+        </p:nvPicPr>
+        <p:blipFill>
+          <a:blip r:embed="rId2"/>
+          <a:stretch>
+            <a:fillRect/>
+          </a:stretch>
+        </p:blipFill>
+        <p:spPr>
+          <a:xfrm>
+            <a:off x="761847" y="0"/>
+            <a:ext cx="10668000" cy="6858000"/>
+          </a:xfrm>
+          <a:prstGeom prst="rect">
+            <a:avLst/>
+          </a:prstGeom>
+        </p:spPr>
+      </p:pic>
+      <p:sp>
+        <p:nvSpPr>
+          <p:cNvPr id="4" name="Rectangle 3"/>
           <p:cNvSpPr/>
           <p:nvPr/>
         </p:nvSpPr>
         <p:spPr>
           <a:xfrm>
             <a:off x="0" y="0"/>
-            <a:ext cx="228600" cy="6858000"/>
+            <a:ext cx="201168" cy="6858000"/>
           </a:xfrm>
           <a:prstGeom prst="rect">
             <a:avLst/>
@@ -3187,14 +3211,58 @@
       </p:sp>
       <p:sp>
         <p:nvSpPr>
-          <p:cNvPr id="4" name="TextBox 3"/>
+          <p:cNvPr id="5" name="Rectangle 4"/>
+          <p:cNvSpPr/>
+          <p:nvPr/>
+        </p:nvSpPr>
+        <p:spPr>
+          <a:xfrm>
+            <a:off x="777240" y="649224"/>
+            <a:ext cx="310896" cy="38100"/>
+          </a:xfrm>
+          <a:prstGeom prst="rect">
+            <a:avLst/>
+          </a:prstGeom>
+          <a:solidFill>
+            <a:srgbClr val="FF5722"/>
+          </a:solidFill>
+          <a:ln>
+            <a:noFill/>
+          </a:ln>
+          <a:effectLst/>
+        </p:spPr>
+        <p:style>
+          <a:lnRef idx="1">
+            <a:schemeClr val="accent1"/>
+          </a:lnRef>
+          <a:fillRef idx="3">
+            <a:schemeClr val="accent1"/>
+          </a:fillRef>
+          <a:effectRef idx="2">
+            <a:schemeClr val="accent1"/>
+          </a:effectRef>
+          <a:fontRef idx="minor">
+            <a:schemeClr val="lt1"/>
+          </a:fontRef>
+        </p:style>
+        <p:txBody>
+          <a:bodyPr rtlCol="0" anchor="ctr"/>
+          <a:lstStyle/>
+          <a:p>
+            <a:pPr algn="ctr"/>
+          </a:p>
+        </p:txBody>
+      </p:sp>
+      <p:sp>
+        <p:nvSpPr>
+          <p:cNvPr id="6" name="TextBox 5"/>
           <p:cNvSpPr txBox="1"/>
           <p:nvPr/>
         </p:nvSpPr>
         <p:spPr>
           <a:xfrm>
-            <a:off x="777240" y="640080"/>
-            <a:ext cx="10058400" cy="457200"/>
+            <a:off x="1188720" y="566928"/>
+            <a:ext cx="7315200" cy="411480"/>
           </a:xfrm>
           <a:prstGeom prst="rect">
             <a:avLst/>
@@ -3208,6 +3276,9 @@
           <a:lstStyle/>
           <a:p>
             <a:pPr algn="l">
+              <a:spcBef>
+                <a:spcPts val="0"/>
+              </a:spcBef>
               <a:spcAft>
                 <a:spcPts val="600"/>
               </a:spcAft>
@@ -3226,14 +3297,14 @@
       </p:sp>
       <p:sp>
         <p:nvSpPr>
-          <p:cNvPr id="5" name="TextBox 4"/>
+          <p:cNvPr id="7" name="TextBox 6"/>
           <p:cNvSpPr txBox="1"/>
           <p:nvPr/>
         </p:nvSpPr>
         <p:spPr>
           <a:xfrm>
-            <a:off x="777240" y="1828800"/>
-            <a:ext cx="10607040" cy="2743200"/>
+            <a:off x="777240" y="1325880"/>
+            <a:ext cx="10058400" cy="2377440"/>
           </a:xfrm>
           <a:prstGeom prst="rect">
             <a:avLst/>
@@ -3247,12 +3318,15 @@
           <a:lstStyle/>
           <a:p>
             <a:pPr algn="l">
+              <a:spcBef>
+                <a:spcPts val="0"/>
+              </a:spcBef>
               <a:spcAft>
                 <a:spcPts val="0"/>
               </a:spcAft>
             </a:pPr>
             <a:r>
-              <a:rPr sz="7600" b="1" i="0">
+              <a:rPr sz="7000" b="1" i="0">
                 <a:solidFill>
                   <a:srgbClr val="EAF0FA"/>
                 </a:solidFill>
@@ -3268,7 +3342,7 @@
               </a:spcAft>
             </a:pPr>
             <a:r>
-              <a:rPr sz="7600" b="1" i="0">
+              <a:rPr sz="7000" b="1" i="0">
                 <a:solidFill>
                   <a:srgbClr val="EAF0FA"/>
                 </a:solidFill>
@@ -3277,7 +3351,7 @@
               <a:t>в </a:t>
             </a:r>
             <a:r>
-              <a:rPr sz="7600" b="1" i="0">
+              <a:rPr sz="7000" b="1" i="0">
                 <a:solidFill>
                   <a:srgbClr val="FFC107"/>
                 </a:solidFill>
@@ -3290,14 +3364,14 @@
       </p:sp>
       <p:sp>
         <p:nvSpPr>
-          <p:cNvPr id="6" name="TextBox 5"/>
+          <p:cNvPr id="8" name="TextBox 7"/>
           <p:cNvSpPr txBox="1"/>
           <p:nvPr/>
         </p:nvSpPr>
         <p:spPr>
           <a:xfrm>
-            <a:off x="777240" y="4572000"/>
-            <a:ext cx="9144000" cy="1188720"/>
+            <a:off x="822960" y="5074920"/>
+            <a:ext cx="7315200" cy="1097280"/>
           </a:xfrm>
           <a:prstGeom prst="rect">
             <a:avLst/>
@@ -3311,33 +3385,36 @@
           <a:lstStyle/>
           <a:p>
             <a:pPr algn="l">
+              <a:spcBef>
+                <a:spcPts val="0"/>
+              </a:spcBef>
               <a:spcAft>
                 <a:spcPts val="600"/>
               </a:spcAft>
             </a:pPr>
             <a:r>
-              <a:rPr sz="2000" b="0" i="0">
+              <a:rPr sz="1900" b="0" i="0">
                 <a:solidFill>
                   <a:srgbClr val="8B9AB8"/>
                 </a:solidFill>
                 <a:latin typeface="Arial"/>
               </a:rPr>
-              <a:t>Современное и безопасное пространство для досуга и спорта
-детей и подростков города.</a:t>
-            </a:r>
-          </a:p>
-        </p:txBody>
-      </p:sp>
-      <p:sp>
-        <p:nvSpPr>
-          <p:cNvPr id="7" name="Rounded Rectangle 6"/>
+              <a:t>Современное и безопасное пространство для досуга
+и спорта детей и подростков города.</a:t>
+            </a:r>
+          </a:p>
+        </p:txBody>
+      </p:sp>
+      <p:sp>
+        <p:nvSpPr>
+          <p:cNvPr id="9" name="Rounded Rectangle 8"/>
           <p:cNvSpPr/>
           <p:nvPr/>
         </p:nvSpPr>
         <p:spPr>
           <a:xfrm>
-            <a:off x="777240" y="5852160"/>
-            <a:ext cx="4206240" cy="548640"/>
+            <a:off x="822960" y="5989320"/>
+            <a:ext cx="4114800" cy="548640"/>
           </a:xfrm>
           <a:prstGeom prst="roundRect">
             <a:avLst/>
@@ -3443,16 +3520,40 @@
           </a:p>
         </p:txBody>
       </p:sp>
-      <p:sp>
-        <p:nvSpPr>
-          <p:cNvPr id="3" name="Rectangle 2"/>
+      <p:pic>
+        <p:nvPicPr>
+          <p:cNvPr id="3" name="Picture 2" descr="final.png"/>
+          <p:cNvPicPr>
+            <a:picLocks noChangeAspect="1"/>
+          </p:cNvPicPr>
+          <p:nvPr/>
+        </p:nvPicPr>
+        <p:blipFill>
+          <a:blip r:embed="rId2"/>
+          <a:stretch>
+            <a:fillRect/>
+          </a:stretch>
+        </p:blipFill>
+        <p:spPr>
+          <a:xfrm>
+            <a:off x="761847" y="0"/>
+            <a:ext cx="10668000" cy="6858000"/>
+          </a:xfrm>
+          <a:prstGeom prst="rect">
+            <a:avLst/>
+          </a:prstGeom>
+        </p:spPr>
+      </p:pic>
+      <p:sp>
+        <p:nvSpPr>
+          <p:cNvPr id="4" name="Rectangle 3"/>
           <p:cNvSpPr/>
           <p:nvPr/>
         </p:nvSpPr>
         <p:spPr>
           <a:xfrm>
             <a:off x="0" y="0"/>
-            <a:ext cx="228600" cy="6858000"/>
+            <a:ext cx="201168" cy="6858000"/>
           </a:xfrm>
           <a:prstGeom prst="rect">
             <a:avLst/>
@@ -3489,108 +3590,14 @@
       </p:sp>
       <p:sp>
         <p:nvSpPr>
-          <p:cNvPr id="4" name="TextBox 3"/>
-          <p:cNvSpPr txBox="1"/>
-          <p:nvPr/>
-        </p:nvSpPr>
-        <p:spPr>
-          <a:xfrm>
-            <a:off x="777240" y="640080"/>
-            <a:ext cx="10058400" cy="457200"/>
-          </a:xfrm>
-          <a:prstGeom prst="rect">
-            <a:avLst/>
-          </a:prstGeom>
-          <a:noFill/>
-        </p:spPr>
-        <p:txBody>
-          <a:bodyPr wrap="square" anchor="t">
-            <a:spAutoFit/>
-          </a:bodyPr>
-          <a:lstStyle/>
-          <a:p>
-            <a:pPr algn="l">
-              <a:spcAft>
-                <a:spcPts val="600"/>
-              </a:spcAft>
-            </a:pPr>
-            <a:r>
-              <a:rPr sz="1400" b="1" i="0">
-                <a:solidFill>
-                  <a:srgbClr val="FFC107"/>
-                </a:solidFill>
-                <a:latin typeface="Arial"/>
-              </a:rPr>
-              <a:t>ПРИЗЫВ К ДЕЙСТВИЮ</a:t>
-            </a:r>
-          </a:p>
-        </p:txBody>
-      </p:sp>
-      <p:sp>
-        <p:nvSpPr>
-          <p:cNvPr id="5" name="TextBox 4"/>
-          <p:cNvSpPr txBox="1"/>
-          <p:nvPr/>
-        </p:nvSpPr>
-        <p:spPr>
-          <a:xfrm>
-            <a:off x="777240" y="1737360"/>
-            <a:ext cx="10607040" cy="1828800"/>
-          </a:xfrm>
-          <a:prstGeom prst="rect">
-            <a:avLst/>
-          </a:prstGeom>
-          <a:noFill/>
-        </p:spPr>
-        <p:txBody>
-          <a:bodyPr wrap="square" anchor="t">
-            <a:spAutoFit/>
-          </a:bodyPr>
-          <a:lstStyle/>
-          <a:p>
-            <a:pPr algn="l">
-              <a:spcAft>
-                <a:spcPts val="0"/>
-              </a:spcAft>
-            </a:pPr>
-            <a:r>
-              <a:rPr sz="5800" b="1" i="0">
-                <a:solidFill>
-                  <a:srgbClr val="EAF0FA"/>
-                </a:solidFill>
-                <a:latin typeface="Arial"/>
-              </a:rPr>
-              <a:t>Дадим детям</a:t>
-            </a:r>
-          </a:p>
-          <a:p>
-            <a:pPr algn="l">
-              <a:spcAft>
-                <a:spcPts val="0"/>
-              </a:spcAft>
-            </a:pPr>
-            <a:r>
-              <a:rPr sz="5800" b="1" i="0">
-                <a:solidFill>
-                  <a:srgbClr val="FFC107"/>
-                </a:solidFill>
-                <a:latin typeface="Arial"/>
-              </a:rPr>
-              <a:t>место для роста</a:t>
-            </a:r>
-          </a:p>
-        </p:txBody>
-      </p:sp>
-      <p:sp>
-        <p:nvSpPr>
-          <p:cNvPr id="6" name="Rectangle 5"/>
+          <p:cNvPr id="5" name="Rectangle 4"/>
           <p:cNvSpPr/>
           <p:nvPr/>
         </p:nvSpPr>
         <p:spPr>
           <a:xfrm>
-            <a:off x="822960" y="4114800"/>
-            <a:ext cx="73152" cy="1188720"/>
+            <a:off x="777240" y="649224"/>
+            <a:ext cx="310896" cy="38100"/>
           </a:xfrm>
           <a:prstGeom prst="rect">
             <a:avLst/>
@@ -3627,14 +3634,14 @@
       </p:sp>
       <p:sp>
         <p:nvSpPr>
-          <p:cNvPr id="7" name="TextBox 6"/>
+          <p:cNvPr id="6" name="TextBox 5"/>
           <p:cNvSpPr txBox="1"/>
           <p:nvPr/>
         </p:nvSpPr>
         <p:spPr>
           <a:xfrm>
-            <a:off x="1051560" y="4114800"/>
-            <a:ext cx="9144000" cy="1280160"/>
+            <a:off x="1188720" y="566928"/>
+            <a:ext cx="7315200" cy="411480"/>
           </a:xfrm>
           <a:prstGeom prst="rect">
             <a:avLst/>
@@ -3642,41 +3649,104 @@
           <a:noFill/>
         </p:spPr>
         <p:txBody>
-          <a:bodyPr wrap="square" anchor="ctr">
+          <a:bodyPr wrap="square" anchor="t">
             <a:spAutoFit/>
           </a:bodyPr>
           <a:lstStyle/>
           <a:p>
             <a:pPr algn="l">
+              <a:spcBef>
+                <a:spcPts val="0"/>
+              </a:spcBef>
               <a:spcAft>
                 <a:spcPts val="600"/>
               </a:spcAft>
             </a:pPr>
             <a:r>
-              <a:rPr sz="2400" b="1" i="1">
+              <a:rPr sz="1400" b="1" i="0">
+                <a:solidFill>
+                  <a:srgbClr val="FFC107"/>
+                </a:solidFill>
+                <a:latin typeface="Arial"/>
+              </a:rPr>
+              <a:t>ПРИЗЫВ К ДЕЙСТВИЮ</a:t>
+            </a:r>
+          </a:p>
+        </p:txBody>
+      </p:sp>
+      <p:sp>
+        <p:nvSpPr>
+          <p:cNvPr id="7" name="TextBox 6"/>
+          <p:cNvSpPr txBox="1"/>
+          <p:nvPr/>
+        </p:nvSpPr>
+        <p:spPr>
+          <a:xfrm>
+            <a:off x="777240" y="1371600"/>
+            <a:ext cx="10058400" cy="1828800"/>
+          </a:xfrm>
+          <a:prstGeom prst="rect">
+            <a:avLst/>
+          </a:prstGeom>
+          <a:noFill/>
+        </p:spPr>
+        <p:txBody>
+          <a:bodyPr wrap="square" anchor="t">
+            <a:spAutoFit/>
+          </a:bodyPr>
+          <a:lstStyle/>
+          <a:p>
+            <a:pPr algn="l">
+              <a:spcBef>
+                <a:spcPts val="0"/>
+              </a:spcBef>
+              <a:spcAft>
+                <a:spcPts val="0"/>
+              </a:spcAft>
+            </a:pPr>
+            <a:r>
+              <a:rPr sz="5400" b="1" i="0">
                 <a:solidFill>
                   <a:srgbClr val="EAF0FA"/>
                 </a:solidFill>
                 <a:latin typeface="Arial"/>
               </a:rPr>
-              <a:t>«Скейт-парк — это инвестиция в здоровое, активное
-и успешное будущее Южной Осетии».</a:t>
-            </a:r>
-          </a:p>
-        </p:txBody>
-      </p:sp>
-      <p:sp>
-        <p:nvSpPr>
-          <p:cNvPr id="8" name="Rounded Rectangle 7"/>
+              <a:t>Дадим детям</a:t>
+            </a:r>
+          </a:p>
+          <a:p>
+            <a:pPr algn="l">
+              <a:spcBef>
+                <a:spcPts val="0"/>
+              </a:spcBef>
+              <a:spcAft>
+                <a:spcPts val="0"/>
+              </a:spcAft>
+            </a:pPr>
+            <a:r>
+              <a:rPr sz="5400" b="1" i="0">
+                <a:solidFill>
+                  <a:srgbClr val="FFC107"/>
+                </a:solidFill>
+                <a:latin typeface="Arial"/>
+              </a:rPr>
+              <a:t>место для роста</a:t>
+            </a:r>
+          </a:p>
+        </p:txBody>
+      </p:sp>
+      <p:sp>
+        <p:nvSpPr>
+          <p:cNvPr id="8" name="Rectangle 7"/>
           <p:cNvSpPr/>
           <p:nvPr/>
         </p:nvSpPr>
         <p:spPr>
           <a:xfrm>
-            <a:off x="777240" y="5669280"/>
-            <a:ext cx="3108960" cy="594360"/>
-          </a:xfrm>
-          <a:prstGeom prst="roundRect">
+            <a:off x="822960" y="3611880"/>
+            <a:ext cx="64008" cy="1097280"/>
+          </a:xfrm>
+          <a:prstGeom prst="rect">
             <a:avLst/>
           </a:prstGeom>
           <a:solidFill>
@@ -3706,15 +3776,6 @@
           <a:lstStyle/>
           <a:p>
             <a:pPr algn="ctr"/>
-            <a:r>
-              <a:rPr sz="1800" b="1" i="0">
-                <a:solidFill>
-                  <a:srgbClr val="1A1205"/>
-                </a:solidFill>
-                <a:latin typeface="Arial"/>
-              </a:rPr>
-              <a:t>Поддержать проект</a:t>
-            </a:r>
           </a:p>
         </p:txBody>
       </p:sp>
@@ -3726,8 +3787,8 @@
         </p:nvSpPr>
         <p:spPr>
           <a:xfrm>
-            <a:off x="4114800" y="5669280"/>
-            <a:ext cx="3657600" cy="594360"/>
+            <a:off x="1051560" y="3566160"/>
+            <a:ext cx="3657600" cy="1280160"/>
           </a:xfrm>
           <a:prstGeom prst="rect">
             <a:avLst/>
@@ -3741,6 +3802,104 @@
           <a:lstStyle/>
           <a:p>
             <a:pPr algn="l">
+              <a:spcBef>
+                <a:spcPts val="0"/>
+              </a:spcBef>
+              <a:spcAft>
+                <a:spcPts val="600"/>
+              </a:spcAft>
+            </a:pPr>
+            <a:r>
+              <a:rPr sz="2100" b="1" i="1">
+                <a:solidFill>
+                  <a:srgbClr val="EAF0FA"/>
+                </a:solidFill>
+                <a:latin typeface="Arial"/>
+              </a:rPr>
+              <a:t>«Скейт-парк — это инвестиция в активное будущее Южной Осетии».</a:t>
+            </a:r>
+          </a:p>
+        </p:txBody>
+      </p:sp>
+      <p:sp>
+        <p:nvSpPr>
+          <p:cNvPr id="10" name="Rounded Rectangle 9"/>
+          <p:cNvSpPr/>
+          <p:nvPr/>
+        </p:nvSpPr>
+        <p:spPr>
+          <a:xfrm>
+            <a:off x="822960" y="5212080"/>
+            <a:ext cx="3108960" cy="566928"/>
+          </a:xfrm>
+          <a:prstGeom prst="roundRect">
+            <a:avLst/>
+          </a:prstGeom>
+          <a:solidFill>
+            <a:srgbClr val="FF5722"/>
+          </a:solidFill>
+          <a:ln>
+            <a:noFill/>
+          </a:ln>
+          <a:effectLst/>
+        </p:spPr>
+        <p:style>
+          <a:lnRef idx="1">
+            <a:schemeClr val="accent1"/>
+          </a:lnRef>
+          <a:fillRef idx="3">
+            <a:schemeClr val="accent1"/>
+          </a:fillRef>
+          <a:effectRef idx="2">
+            <a:schemeClr val="accent1"/>
+          </a:effectRef>
+          <a:fontRef idx="minor">
+            <a:schemeClr val="lt1"/>
+          </a:fontRef>
+        </p:style>
+        <p:txBody>
+          <a:bodyPr rtlCol="0" anchor="ctr"/>
+          <a:lstStyle/>
+          <a:p>
+            <a:pPr algn="ctr"/>
+            <a:r>
+              <a:rPr sz="1800" b="1" i="0">
+                <a:solidFill>
+                  <a:srgbClr val="0A0E1A"/>
+                </a:solidFill>
+                <a:latin typeface="Arial"/>
+              </a:rPr>
+              <a:t>Поддержать проект</a:t>
+            </a:r>
+          </a:p>
+        </p:txBody>
+      </p:sp>
+      <p:sp>
+        <p:nvSpPr>
+          <p:cNvPr id="11" name="TextBox 10"/>
+          <p:cNvSpPr txBox="1"/>
+          <p:nvPr/>
+        </p:nvSpPr>
+        <p:spPr>
+          <a:xfrm>
+            <a:off x="4160520" y="5212080"/>
+            <a:ext cx="3657600" cy="566928"/>
+          </a:xfrm>
+          <a:prstGeom prst="rect">
+            <a:avLst/>
+          </a:prstGeom>
+          <a:noFill/>
+        </p:spPr>
+        <p:txBody>
+          <a:bodyPr wrap="square" anchor="ctr">
+            <a:spAutoFit/>
+          </a:bodyPr>
+          <a:lstStyle/>
+          <a:p>
+            <a:pPr algn="l">
+              <a:spcBef>
+                <a:spcPts val="0"/>
+              </a:spcBef>
               <a:spcAft>
                 <a:spcPts val="600"/>
               </a:spcAft>
@@ -3821,14 +3980,58 @@
       </p:sp>
       <p:sp>
         <p:nvSpPr>
-          <p:cNvPr id="3" name="TextBox 2"/>
+          <p:cNvPr id="3" name="Rectangle 2"/>
+          <p:cNvSpPr/>
+          <p:nvPr/>
+        </p:nvSpPr>
+        <p:spPr>
+          <a:xfrm>
+            <a:off x="777240" y="649224"/>
+            <a:ext cx="310896" cy="38100"/>
+          </a:xfrm>
+          <a:prstGeom prst="rect">
+            <a:avLst/>
+          </a:prstGeom>
+          <a:solidFill>
+            <a:srgbClr val="FF5722"/>
+          </a:solidFill>
+          <a:ln>
+            <a:noFill/>
+          </a:ln>
+          <a:effectLst/>
+        </p:spPr>
+        <p:style>
+          <a:lnRef idx="1">
+            <a:schemeClr val="accent1"/>
+          </a:lnRef>
+          <a:fillRef idx="3">
+            <a:schemeClr val="accent1"/>
+          </a:fillRef>
+          <a:effectRef idx="2">
+            <a:schemeClr val="accent1"/>
+          </a:effectRef>
+          <a:fontRef idx="minor">
+            <a:schemeClr val="lt1"/>
+          </a:fontRef>
+        </p:style>
+        <p:txBody>
+          <a:bodyPr rtlCol="0" anchor="ctr"/>
+          <a:lstStyle/>
+          <a:p>
+            <a:pPr algn="ctr"/>
+          </a:p>
+        </p:txBody>
+      </p:sp>
+      <p:sp>
+        <p:nvSpPr>
+          <p:cNvPr id="4" name="TextBox 3"/>
           <p:cNvSpPr txBox="1"/>
           <p:nvPr/>
         </p:nvSpPr>
         <p:spPr>
           <a:xfrm>
-            <a:off x="777240" y="640080"/>
-            <a:ext cx="10058400" cy="457200"/>
+            <a:off x="1188720" y="566928"/>
+            <a:ext cx="7315200" cy="411480"/>
           </a:xfrm>
           <a:prstGeom prst="rect">
             <a:avLst/>
@@ -3842,6 +4045,9 @@
           <a:lstStyle/>
           <a:p>
             <a:pPr algn="l">
+              <a:spcBef>
+                <a:spcPts val="0"/>
+              </a:spcBef>
               <a:spcAft>
                 <a:spcPts val="600"/>
               </a:spcAft>
@@ -3860,14 +4066,14 @@
       </p:sp>
       <p:sp>
         <p:nvSpPr>
-          <p:cNvPr id="4" name="TextBox 3"/>
+          <p:cNvPr id="5" name="TextBox 4"/>
           <p:cNvSpPr txBox="1"/>
           <p:nvPr/>
         </p:nvSpPr>
         <p:spPr>
           <a:xfrm>
             <a:off x="777240" y="1280160"/>
-            <a:ext cx="10607040" cy="1645920"/>
+            <a:ext cx="5577840" cy="1828800"/>
           </a:xfrm>
           <a:prstGeom prst="rect">
             <a:avLst/>
@@ -3881,12 +4087,15 @@
           <a:lstStyle/>
           <a:p>
             <a:pPr algn="l">
+              <a:spcBef>
+                <a:spcPts val="0"/>
+              </a:spcBef>
               <a:spcAft>
                 <a:spcPts val="0"/>
               </a:spcAft>
             </a:pPr>
             <a:r>
-              <a:rPr sz="4200" b="1" i="0">
+              <a:rPr sz="3400" b="1" i="0">
                 <a:solidFill>
                   <a:srgbClr val="EAF0FA"/>
                 </a:solidFill>
@@ -3897,12 +4106,15 @@
           </a:p>
           <a:p>
             <a:pPr algn="l">
+              <a:spcBef>
+                <a:spcPts val="0"/>
+              </a:spcBef>
               <a:spcAft>
                 <a:spcPts val="0"/>
               </a:spcAft>
             </a:pPr>
             <a:r>
-              <a:rPr sz="4200" b="1" i="0">
+              <a:rPr sz="3400" b="1" i="0">
                 <a:solidFill>
                   <a:srgbClr val="EAF0FA"/>
                 </a:solidFill>
@@ -3915,14 +4127,14 @@
       </p:sp>
       <p:sp>
         <p:nvSpPr>
-          <p:cNvPr id="5" name="TextBox 4"/>
+          <p:cNvPr id="6" name="TextBox 5"/>
           <p:cNvSpPr txBox="1"/>
           <p:nvPr/>
         </p:nvSpPr>
         <p:spPr>
           <a:xfrm>
-            <a:off x="777240" y="3200400"/>
-            <a:ext cx="10058400" cy="2743200"/>
+            <a:off x="868680" y="3108960"/>
+            <a:ext cx="5212080" cy="3474720"/>
           </a:xfrm>
           <a:prstGeom prst="rect">
             <a:avLst/>
@@ -3936,69 +4148,146 @@
           <a:lstStyle/>
           <a:p>
             <a:pPr>
+              <a:spcBef>
+                <a:spcPts val="0"/>
+              </a:spcBef>
               <a:spcAft>
-                <a:spcPts val="1400"/>
+                <a:spcPts val="1100"/>
               </a:spcAft>
             </a:pPr>
             <a:r>
-              <a:rPr sz="1900" b="0" i="0">
-                <a:solidFill>
-                  <a:srgbClr val="EAF0FA"/>
-                </a:solidFill>
-                <a:latin typeface="Arial"/>
-              </a:rPr>
-              <a:t>В Цхинвале и в Южной Осетии в целом </a:t>
-            </a:r>
-            <a:r>
-              <a:rPr sz="1900" b="1" i="0">
-                <a:solidFill>
-                  <a:srgbClr val="FFC107"/>
-                </a:solidFill>
-                <a:latin typeface="Arial"/>
-              </a:rPr>
-              <a:t>не развита инфраструктура для досуга</a:t>
-            </a:r>
-            <a:r>
-              <a:rPr sz="1900" b="0" i="0">
-                <a:solidFill>
-                  <a:srgbClr val="EAF0FA"/>
-                </a:solidFill>
-                <a:latin typeface="Arial"/>
-              </a:rPr>
-              <a:t> молодёжи. Современных площадок для активного отдыха почти нет.</a:t>
-            </a:r>
-          </a:p>
-          <a:p>
-            <a:r>
-              <a:rPr sz="1900" b="0" i="0">
-                <a:solidFill>
-                  <a:srgbClr val="EAF0FA"/>
-                </a:solidFill>
-                <a:latin typeface="Arial"/>
-              </a:rPr>
-              <a:t>В итоге дети катаются на оживлённых улицах, парковках и тротуарах — это </a:t>
-            </a:r>
-            <a:r>
-              <a:rPr sz="1900" b="1" i="0">
-                <a:solidFill>
-                  <a:srgbClr val="FFC107"/>
-                </a:solidFill>
-                <a:latin typeface="Arial"/>
-              </a:rPr>
-              <a:t>опасно</a:t>
-            </a:r>
-            <a:r>
-              <a:rPr sz="1900" b="0" i="0">
-                <a:solidFill>
-                  <a:srgbClr val="EAF0FA"/>
-                </a:solidFill>
-                <a:latin typeface="Arial"/>
-              </a:rPr>
-              <a:t> и для них, и для прохожих. Энергия молодёжи не находит здорового выхода.</a:t>
-            </a:r>
-          </a:p>
-        </p:txBody>
-      </p:sp>
+              <a:rPr sz="1300" b="1" i="0">
+                <a:solidFill>
+                  <a:srgbClr val="FF5722"/>
+                </a:solidFill>
+                <a:latin typeface="Arial"/>
+              </a:rPr>
+              <a:t>●  </a:t>
+            </a:r>
+            <a:r>
+              <a:rPr sz="1600" b="1" i="0">
+                <a:solidFill>
+                  <a:srgbClr val="FFFFFF"/>
+                </a:solidFill>
+                <a:latin typeface="Arial"/>
+              </a:rPr>
+              <a:t>Нет инфраструктуры.  </a:t>
+            </a:r>
+            <a:r>
+              <a:rPr sz="1500" b="0" i="0">
+                <a:solidFill>
+                  <a:srgbClr val="8B9AB8"/>
+                </a:solidFill>
+                <a:latin typeface="Arial"/>
+              </a:rPr>
+              <a:t>В Цхинвале почти нет современных площадок для активного отдыха молодёжи.</a:t>
+            </a:r>
+          </a:p>
+          <a:p>
+            <a:pPr>
+              <a:spcBef>
+                <a:spcPts val="0"/>
+              </a:spcBef>
+              <a:spcAft>
+                <a:spcPts val="1100"/>
+              </a:spcAft>
+            </a:pPr>
+            <a:r>
+              <a:rPr sz="1300" b="1" i="0">
+                <a:solidFill>
+                  <a:srgbClr val="FF5722"/>
+                </a:solidFill>
+                <a:latin typeface="Arial"/>
+              </a:rPr>
+              <a:t>●  </a:t>
+            </a:r>
+            <a:r>
+              <a:rPr sz="1600" b="1" i="0">
+                <a:solidFill>
+                  <a:srgbClr val="FFFFFF"/>
+                </a:solidFill>
+                <a:latin typeface="Arial"/>
+              </a:rPr>
+              <a:t>Опасно.  </a:t>
+            </a:r>
+            <a:r>
+              <a:rPr sz="1500" b="0" i="0">
+                <a:solidFill>
+                  <a:srgbClr val="8B9AB8"/>
+                </a:solidFill>
+                <a:latin typeface="Arial"/>
+              </a:rPr>
+              <a:t>Дети катаются на улицах, парковках и тротуарах — риск для них и прохожих.</a:t>
+            </a:r>
+          </a:p>
+          <a:p>
+            <a:pPr>
+              <a:spcBef>
+                <a:spcPts val="0"/>
+              </a:spcBef>
+              <a:spcAft>
+                <a:spcPts val="1100"/>
+              </a:spcAft>
+            </a:pPr>
+            <a:r>
+              <a:rPr sz="1300" b="1" i="0">
+                <a:solidFill>
+                  <a:srgbClr val="FF5722"/>
+                </a:solidFill>
+                <a:latin typeface="Arial"/>
+              </a:rPr>
+              <a:t>●  </a:t>
+            </a:r>
+            <a:r>
+              <a:rPr sz="1600" b="1" i="0">
+                <a:solidFill>
+                  <a:srgbClr val="FFFFFF"/>
+                </a:solidFill>
+                <a:latin typeface="Arial"/>
+              </a:rPr>
+              <a:t>Энергия без выхода.  </a:t>
+            </a:r>
+            <a:r>
+              <a:rPr sz="1500" b="0" i="0">
+                <a:solidFill>
+                  <a:srgbClr val="8B9AB8"/>
+                </a:solidFill>
+                <a:latin typeface="Arial"/>
+              </a:rPr>
+              <a:t>У подростков нет места для здорового и полезного досуга.</a:t>
+            </a:r>
+          </a:p>
+        </p:txBody>
+      </p:sp>
+      <p:pic>
+        <p:nvPicPr>
+          <p:cNvPr id="7" name="Picture 6" descr="problem.png"/>
+          <p:cNvPicPr>
+            <a:picLocks noChangeAspect="1"/>
+          </p:cNvPicPr>
+          <p:nvPr/>
+        </p:nvPicPr>
+        <p:blipFill>
+          <a:blip r:embed="rId2"/>
+          <a:stretch>
+            <a:fillRect/>
+          </a:stretch>
+        </p:blipFill>
+        <p:spPr>
+          <a:xfrm>
+            <a:off x="6355080" y="1874519"/>
+            <a:ext cx="5212080" cy="3350622"/>
+          </a:xfrm>
+          <a:prstGeom prst="rect">
+            <a:avLst/>
+          </a:prstGeom>
+          <a:ln w="15875">
+            <a:solidFill>
+              <a:srgbClr val="243150"/>
+            </a:solidFill>
+          </a:ln>
+        </p:spPr>
+      </p:pic>
     </p:spTree>
   </p:cSld>
   <p:clrMapOvr>
@@ -4063,121 +4352,23 @@
       </p:sp>
       <p:sp>
         <p:nvSpPr>
-          <p:cNvPr id="3" name="TextBox 2"/>
-          <p:cNvSpPr txBox="1"/>
-          <p:nvPr/>
-        </p:nvSpPr>
-        <p:spPr>
-          <a:xfrm>
-            <a:off x="777240" y="640080"/>
-            <a:ext cx="10058400" cy="457200"/>
+          <p:cNvPr id="3" name="Rectangle 2"/>
+          <p:cNvSpPr/>
+          <p:nvPr/>
+        </p:nvSpPr>
+        <p:spPr>
+          <a:xfrm>
+            <a:off x="777240" y="649224"/>
+            <a:ext cx="310896" cy="38100"/>
           </a:xfrm>
           <a:prstGeom prst="rect">
             <a:avLst/>
           </a:prstGeom>
-          <a:noFill/>
-        </p:spPr>
-        <p:txBody>
-          <a:bodyPr wrap="square" anchor="t">
-            <a:spAutoFit/>
-          </a:bodyPr>
-          <a:lstStyle/>
-          <a:p>
-            <a:pPr algn="l">
-              <a:spcAft>
-                <a:spcPts val="600"/>
-              </a:spcAft>
-            </a:pPr>
-            <a:r>
-              <a:rPr sz="1400" b="1" i="0">
-                <a:solidFill>
-                  <a:srgbClr val="FFC107"/>
-                </a:solidFill>
-                <a:latin typeface="Arial"/>
-              </a:rPr>
-              <a:t>РЕШЕНИЕ</a:t>
-            </a:r>
-          </a:p>
-        </p:txBody>
-      </p:sp>
-      <p:sp>
-        <p:nvSpPr>
-          <p:cNvPr id="4" name="TextBox 3"/>
-          <p:cNvSpPr txBox="1"/>
-          <p:nvPr/>
-        </p:nvSpPr>
-        <p:spPr>
-          <a:xfrm>
-            <a:off x="777240" y="1280160"/>
-            <a:ext cx="10607040" cy="1645920"/>
-          </a:xfrm>
-          <a:prstGeom prst="rect">
-            <a:avLst/>
-          </a:prstGeom>
-          <a:noFill/>
-        </p:spPr>
-        <p:txBody>
-          <a:bodyPr wrap="square" anchor="t">
-            <a:spAutoFit/>
-          </a:bodyPr>
-          <a:lstStyle/>
-          <a:p>
-            <a:pPr algn="l">
-              <a:spcAft>
-                <a:spcPts val="0"/>
-              </a:spcAft>
-            </a:pPr>
-            <a:r>
-              <a:rPr sz="4200" b="1" i="0">
-                <a:solidFill>
-                  <a:srgbClr val="EAF0FA"/>
-                </a:solidFill>
-                <a:latin typeface="Arial"/>
-              </a:rPr>
-              <a:t>Построить современный</a:t>
-            </a:r>
-          </a:p>
-          <a:p>
-            <a:pPr algn="l">
-              <a:spcAft>
-                <a:spcPts val="0"/>
-              </a:spcAft>
-            </a:pPr>
-            <a:r>
-              <a:rPr sz="4200" b="1" i="0">
-                <a:solidFill>
-                  <a:srgbClr val="FFC107"/>
-                </a:solidFill>
-                <a:latin typeface="Arial"/>
-              </a:rPr>
-              <a:t>скейт-парк</a:t>
-            </a:r>
-          </a:p>
-        </p:txBody>
-      </p:sp>
-      <p:sp>
-        <p:nvSpPr>
-          <p:cNvPr id="5" name="Rounded Rectangle 4"/>
-          <p:cNvSpPr/>
-          <p:nvPr/>
-        </p:nvSpPr>
-        <p:spPr>
-          <a:xfrm>
-            <a:off x="777240" y="3383280"/>
-            <a:ext cx="3410712" cy="2651760"/>
-          </a:xfrm>
-          <a:prstGeom prst="roundRect">
-            <a:avLst>
-              <a:gd name="adj" fmla="val 6000"/>
-            </a:avLst>
-          </a:prstGeom>
           <a:solidFill>
-            <a:srgbClr val="141D33"/>
+            <a:srgbClr val="FF5722"/>
           </a:solidFill>
-          <a:ln w="12700">
-            <a:solidFill>
-              <a:srgbClr val="243150"/>
-            </a:solidFill>
+          <a:ln>
+            <a:noFill/>
           </a:ln>
           <a:effectLst/>
         </p:spPr>
@@ -4196,48 +4387,166 @@
           </a:fontRef>
         </p:style>
         <p:txBody>
-          <a:bodyPr rtlCol="0" anchor="ctr" wrap="square" lIns="201168" rIns="201168" tIns="182880" bIns="182880"/>
+          <a:bodyPr rtlCol="0" anchor="ctr"/>
+          <a:lstStyle/>
+          <a:p>
+            <a:pPr algn="ctr"/>
+          </a:p>
+        </p:txBody>
+      </p:sp>
+      <p:sp>
+        <p:nvSpPr>
+          <p:cNvPr id="4" name="TextBox 3"/>
+          <p:cNvSpPr txBox="1"/>
+          <p:nvPr/>
+        </p:nvSpPr>
+        <p:spPr>
+          <a:xfrm>
+            <a:off x="1188720" y="566928"/>
+            <a:ext cx="7315200" cy="411480"/>
+          </a:xfrm>
+          <a:prstGeom prst="rect">
+            <a:avLst/>
+          </a:prstGeom>
+          <a:noFill/>
+        </p:spPr>
+        <p:txBody>
+          <a:bodyPr wrap="square" anchor="t">
+            <a:spAutoFit/>
+          </a:bodyPr>
           <a:lstStyle/>
           <a:p>
             <a:pPr algn="l">
+              <a:spcBef>
+                <a:spcPts val="0"/>
+              </a:spcBef>
               <a:spcAft>
-                <a:spcPts val="400"/>
+                <a:spcPts val="600"/>
               </a:spcAft>
             </a:pPr>
             <a:r>
-              <a:rPr sz="3000" b="0" i="0">
+              <a:rPr sz="1400" b="1" i="0">
                 <a:solidFill>
                   <a:srgbClr val="FFC107"/>
                 </a:solidFill>
                 <a:latin typeface="Arial"/>
               </a:rPr>
-              <a:t>▰</a:t>
-            </a:r>
-          </a:p>
+              <a:t>РЕШЕНИЕ</a:t>
+            </a:r>
+          </a:p>
+        </p:txBody>
+      </p:sp>
+      <p:sp>
+        <p:nvSpPr>
+          <p:cNvPr id="5" name="TextBox 4"/>
+          <p:cNvSpPr txBox="1"/>
+          <p:nvPr/>
+        </p:nvSpPr>
+        <p:spPr>
+          <a:xfrm>
+            <a:off x="777240" y="1280160"/>
+            <a:ext cx="5577840" cy="1828800"/>
+          </a:xfrm>
+          <a:prstGeom prst="rect">
+            <a:avLst/>
+          </a:prstGeom>
+          <a:noFill/>
+        </p:spPr>
+        <p:txBody>
+          <a:bodyPr wrap="square" anchor="t">
+            <a:spAutoFit/>
+          </a:bodyPr>
+          <a:lstStyle/>
           <a:p>
             <a:pPr algn="l">
-              <a:spcAft>
-                <a:spcPts val="500"/>
-              </a:spcAft>
-            </a:pPr>
-            <a:r>
-              <a:rPr sz="1700" b="1" i="0">
-                <a:solidFill>
-                  <a:srgbClr val="FFFFFF"/>
-                </a:solidFill>
-                <a:latin typeface="Arial"/>
-              </a:rPr>
-              <a:t>Качественное покрытие</a:t>
-            </a:r>
-          </a:p>
-          <a:p>
-            <a:pPr algn="l">
+              <a:spcBef>
+                <a:spcPts val="0"/>
+              </a:spcBef>
               <a:spcAft>
                 <a:spcPts val="0"/>
               </a:spcAft>
             </a:pPr>
             <a:r>
-              <a:rPr sz="1250" b="0" i="0">
+              <a:rPr sz="3400" b="1" i="0">
+                <a:solidFill>
+                  <a:srgbClr val="EAF0FA"/>
+                </a:solidFill>
+                <a:latin typeface="Arial"/>
+              </a:rPr>
+              <a:t>Построить современный</a:t>
+            </a:r>
+          </a:p>
+          <a:p>
+            <a:pPr algn="l">
+              <a:spcBef>
+                <a:spcPts val="0"/>
+              </a:spcBef>
+              <a:spcAft>
+                <a:spcPts val="0"/>
+              </a:spcAft>
+            </a:pPr>
+            <a:r>
+              <a:rPr sz="3400" b="1" i="0">
+                <a:solidFill>
+                  <a:srgbClr val="FFC107"/>
+                </a:solidFill>
+                <a:latin typeface="Arial"/>
+              </a:rPr>
+              <a:t>скейт-парк</a:t>
+            </a:r>
+          </a:p>
+        </p:txBody>
+      </p:sp>
+      <p:sp>
+        <p:nvSpPr>
+          <p:cNvPr id="6" name="TextBox 5"/>
+          <p:cNvSpPr txBox="1"/>
+          <p:nvPr/>
+        </p:nvSpPr>
+        <p:spPr>
+          <a:xfrm>
+            <a:off x="868680" y="3108960"/>
+            <a:ext cx="5212080" cy="3474720"/>
+          </a:xfrm>
+          <a:prstGeom prst="rect">
+            <a:avLst/>
+          </a:prstGeom>
+          <a:noFill/>
+        </p:spPr>
+        <p:txBody>
+          <a:bodyPr wrap="square" anchor="t">
+            <a:spAutoFit/>
+          </a:bodyPr>
+          <a:lstStyle/>
+          <a:p>
+            <a:pPr>
+              <a:spcBef>
+                <a:spcPts val="0"/>
+              </a:spcBef>
+              <a:spcAft>
+                <a:spcPts val="1100"/>
+              </a:spcAft>
+            </a:pPr>
+            <a:r>
+              <a:rPr sz="1300" b="1" i="0">
+                <a:solidFill>
+                  <a:srgbClr val="FF5722"/>
+                </a:solidFill>
+                <a:latin typeface="Arial"/>
+              </a:rPr>
+              <a:t>●  </a:t>
+            </a:r>
+            <a:r>
+              <a:rPr sz="1600" b="1" i="0">
+                <a:solidFill>
+                  <a:srgbClr val="FFFFFF"/>
+                </a:solidFill>
+                <a:latin typeface="Arial"/>
+              </a:rPr>
+              <a:t>Качественное покрытие.  </a:t>
+            </a:r>
+            <a:r>
+              <a:rPr sz="1500" b="0" i="0">
                 <a:solidFill>
                   <a:srgbClr val="8B9AB8"/>
                 </a:solidFill>
@@ -4246,194 +4555,111 @@
               <a:t>Рампы, фигуры и гладкое профессиональное основание.</a:t>
             </a:r>
           </a:p>
-        </p:txBody>
-      </p:sp>
-      <p:sp>
-        <p:nvSpPr>
-          <p:cNvPr id="6" name="Rounded Rectangle 5"/>
-          <p:cNvSpPr/>
-          <p:nvPr/>
-        </p:nvSpPr>
-        <p:spPr>
-          <a:xfrm>
-            <a:off x="4370832" y="3383280"/>
-            <a:ext cx="3410712" cy="2651760"/>
-          </a:xfrm>
-          <a:prstGeom prst="roundRect">
-            <a:avLst>
-              <a:gd name="adj" fmla="val 6000"/>
-            </a:avLst>
-          </a:prstGeom>
-          <a:solidFill>
-            <a:srgbClr val="141D33"/>
-          </a:solidFill>
-          <a:ln w="12700">
+          <a:p>
+            <a:pPr>
+              <a:spcBef>
+                <a:spcPts val="0"/>
+              </a:spcBef>
+              <a:spcAft>
+                <a:spcPts val="1100"/>
+              </a:spcAft>
+            </a:pPr>
+            <a:r>
+              <a:rPr sz="1300" b="1" i="0">
+                <a:solidFill>
+                  <a:srgbClr val="FF5722"/>
+                </a:solidFill>
+                <a:latin typeface="Arial"/>
+              </a:rPr>
+              <a:t>●  </a:t>
+            </a:r>
+            <a:r>
+              <a:rPr sz="1600" b="1" i="0">
+                <a:solidFill>
+                  <a:srgbClr val="FFFFFF"/>
+                </a:solidFill>
+                <a:latin typeface="Arial"/>
+              </a:rPr>
+              <a:t>Зона отдыха.  </a:t>
+            </a:r>
+            <a:r>
+              <a:rPr sz="1500" b="0" i="0">
+                <a:solidFill>
+                  <a:srgbClr val="8B9AB8"/>
+                </a:solidFill>
+                <a:latin typeface="Arial"/>
+              </a:rPr>
+              <a:t>Скамейки, освещение и озеленение — место притяжения города.</a:t>
+            </a:r>
+          </a:p>
+          <a:p>
+            <a:pPr>
+              <a:spcBef>
+                <a:spcPts val="0"/>
+              </a:spcBef>
+              <a:spcAft>
+                <a:spcPts val="1100"/>
+              </a:spcAft>
+            </a:pPr>
+            <a:r>
+              <a:rPr sz="1300" b="1" i="0">
+                <a:solidFill>
+                  <a:srgbClr val="FF5722"/>
+                </a:solidFill>
+                <a:latin typeface="Arial"/>
+              </a:rPr>
+              <a:t>●  </a:t>
+            </a:r>
+            <a:r>
+              <a:rPr sz="1600" b="1" i="0">
+                <a:solidFill>
+                  <a:srgbClr val="FFFFFF"/>
+                </a:solidFill>
+                <a:latin typeface="Arial"/>
+              </a:rPr>
+              <a:t>Для всех уровней.  </a:t>
+            </a:r>
+            <a:r>
+              <a:rPr sz="1500" b="0" i="0">
+                <a:solidFill>
+                  <a:srgbClr val="8B9AB8"/>
+                </a:solidFill>
+                <a:latin typeface="Arial"/>
+              </a:rPr>
+              <a:t>От первых шагов новичка до тренировки сложных трюков.</a:t>
+            </a:r>
+          </a:p>
+        </p:txBody>
+      </p:sp>
+      <p:pic>
+        <p:nvPicPr>
+          <p:cNvPr id="7" name="Picture 6" descr="solution.png"/>
+          <p:cNvPicPr>
+            <a:picLocks noChangeAspect="1"/>
+          </p:cNvPicPr>
+          <p:nvPr/>
+        </p:nvPicPr>
+        <p:blipFill>
+          <a:blip r:embed="rId2"/>
+          <a:stretch>
+            <a:fillRect/>
+          </a:stretch>
+        </p:blipFill>
+        <p:spPr>
+          <a:xfrm>
+            <a:off x="6355080" y="1874519"/>
+            <a:ext cx="5212080" cy="3350622"/>
+          </a:xfrm>
+          <a:prstGeom prst="rect">
+            <a:avLst/>
+          </a:prstGeom>
+          <a:ln w="15875">
             <a:solidFill>
               <a:srgbClr val="243150"/>
             </a:solidFill>
           </a:ln>
-          <a:effectLst/>
-        </p:spPr>
-        <p:style>
-          <a:lnRef idx="1">
-            <a:schemeClr val="accent1"/>
-          </a:lnRef>
-          <a:fillRef idx="3">
-            <a:schemeClr val="accent1"/>
-          </a:fillRef>
-          <a:effectRef idx="2">
-            <a:schemeClr val="accent1"/>
-          </a:effectRef>
-          <a:fontRef idx="minor">
-            <a:schemeClr val="lt1"/>
-          </a:fontRef>
-        </p:style>
-        <p:txBody>
-          <a:bodyPr rtlCol="0" anchor="ctr" wrap="square" lIns="201168" rIns="201168" tIns="182880" bIns="182880"/>
-          <a:lstStyle/>
-          <a:p>
-            <a:pPr algn="l">
-              <a:spcAft>
-                <a:spcPts val="400"/>
-              </a:spcAft>
-            </a:pPr>
-            <a:r>
-              <a:rPr sz="3000" b="0" i="0">
-                <a:solidFill>
-                  <a:srgbClr val="FFC107"/>
-                </a:solidFill>
-                <a:latin typeface="Arial"/>
-              </a:rPr>
-              <a:t>❖</a:t>
-            </a:r>
-          </a:p>
-          <a:p>
-            <a:pPr algn="l">
-              <a:spcAft>
-                <a:spcPts val="500"/>
-              </a:spcAft>
-            </a:pPr>
-            <a:r>
-              <a:rPr sz="1700" b="1" i="0">
-                <a:solidFill>
-                  <a:srgbClr val="FFFFFF"/>
-                </a:solidFill>
-                <a:latin typeface="Arial"/>
-              </a:rPr>
-              <a:t>Зона отдыха</a:t>
-            </a:r>
-          </a:p>
-          <a:p>
-            <a:pPr algn="l">
-              <a:spcAft>
-                <a:spcPts val="0"/>
-              </a:spcAft>
-            </a:pPr>
-            <a:r>
-              <a:rPr sz="1250" b="0" i="0">
-                <a:solidFill>
-                  <a:srgbClr val="8B9AB8"/>
-                </a:solidFill>
-                <a:latin typeface="Arial"/>
-              </a:rPr>
-              <a:t>Скамейки, освещение, озеленение — место притяжения города.</a:t>
-            </a:r>
-          </a:p>
-        </p:txBody>
-      </p:sp>
-      <p:sp>
-        <p:nvSpPr>
-          <p:cNvPr id="7" name="Rounded Rectangle 6"/>
-          <p:cNvSpPr/>
-          <p:nvPr/>
-        </p:nvSpPr>
-        <p:spPr>
-          <a:xfrm>
-            <a:off x="7964424" y="3383280"/>
-            <a:ext cx="3410712" cy="2651760"/>
-          </a:xfrm>
-          <a:prstGeom prst="roundRect">
-            <a:avLst>
-              <a:gd name="adj" fmla="val 6000"/>
-            </a:avLst>
-          </a:prstGeom>
-          <a:solidFill>
-            <a:srgbClr val="141D33"/>
-          </a:solidFill>
-          <a:ln w="12700">
-            <a:solidFill>
-              <a:srgbClr val="243150"/>
-            </a:solidFill>
-          </a:ln>
-          <a:effectLst/>
-        </p:spPr>
-        <p:style>
-          <a:lnRef idx="1">
-            <a:schemeClr val="accent1"/>
-          </a:lnRef>
-          <a:fillRef idx="3">
-            <a:schemeClr val="accent1"/>
-          </a:fillRef>
-          <a:effectRef idx="2">
-            <a:schemeClr val="accent1"/>
-          </a:effectRef>
-          <a:fontRef idx="minor">
-            <a:schemeClr val="lt1"/>
-          </a:fontRef>
-        </p:style>
-        <p:txBody>
-          <a:bodyPr rtlCol="0" anchor="ctr" wrap="square" lIns="201168" rIns="201168" tIns="182880" bIns="182880"/>
-          <a:lstStyle/>
-          <a:p>
-            <a:pPr algn="l">
-              <a:spcAft>
-                <a:spcPts val="400"/>
-              </a:spcAft>
-            </a:pPr>
-            <a:r>
-              <a:rPr sz="3000" b="0" i="0">
-                <a:solidFill>
-                  <a:srgbClr val="FFC107"/>
-                </a:solidFill>
-                <a:latin typeface="Arial"/>
-              </a:rPr>
-              <a:t>◎</a:t>
-            </a:r>
-          </a:p>
-          <a:p>
-            <a:pPr algn="l">
-              <a:spcAft>
-                <a:spcPts val="500"/>
-              </a:spcAft>
-            </a:pPr>
-            <a:r>
-              <a:rPr sz="1700" b="1" i="0">
-                <a:solidFill>
-                  <a:srgbClr val="FFFFFF"/>
-                </a:solidFill>
-                <a:latin typeface="Arial"/>
-              </a:rPr>
-              <a:t>Для всех уровней</a:t>
-            </a:r>
-          </a:p>
-          <a:p>
-            <a:pPr algn="l">
-              <a:spcAft>
-                <a:spcPts val="0"/>
-              </a:spcAft>
-            </a:pPr>
-            <a:r>
-              <a:rPr sz="1250" b="0" i="0">
-                <a:solidFill>
-                  <a:srgbClr val="8B9AB8"/>
-                </a:solidFill>
-                <a:latin typeface="Arial"/>
-              </a:rPr>
-              <a:t>От первых шагов новичка до тренировки сложных трюков.</a:t>
-            </a:r>
-          </a:p>
-        </p:txBody>
-      </p:sp>
+        </p:spPr>
+      </p:pic>
     </p:spTree>
   </p:cSld>
   <p:clrMapOvr>
@@ -4498,14 +4724,58 @@
       </p:sp>
       <p:sp>
         <p:nvSpPr>
-          <p:cNvPr id="3" name="TextBox 2"/>
+          <p:cNvPr id="3" name="Rectangle 2"/>
+          <p:cNvSpPr/>
+          <p:nvPr/>
+        </p:nvSpPr>
+        <p:spPr>
+          <a:xfrm>
+            <a:off x="777240" y="649224"/>
+            <a:ext cx="310896" cy="38100"/>
+          </a:xfrm>
+          <a:prstGeom prst="rect">
+            <a:avLst/>
+          </a:prstGeom>
+          <a:solidFill>
+            <a:srgbClr val="FF5722"/>
+          </a:solidFill>
+          <a:ln>
+            <a:noFill/>
+          </a:ln>
+          <a:effectLst/>
+        </p:spPr>
+        <p:style>
+          <a:lnRef idx="1">
+            <a:schemeClr val="accent1"/>
+          </a:lnRef>
+          <a:fillRef idx="3">
+            <a:schemeClr val="accent1"/>
+          </a:fillRef>
+          <a:effectRef idx="2">
+            <a:schemeClr val="accent1"/>
+          </a:effectRef>
+          <a:fontRef idx="minor">
+            <a:schemeClr val="lt1"/>
+          </a:fontRef>
+        </p:style>
+        <p:txBody>
+          <a:bodyPr rtlCol="0" anchor="ctr"/>
+          <a:lstStyle/>
+          <a:p>
+            <a:pPr algn="ctr"/>
+          </a:p>
+        </p:txBody>
+      </p:sp>
+      <p:sp>
+        <p:nvSpPr>
+          <p:cNvPr id="4" name="TextBox 3"/>
           <p:cNvSpPr txBox="1"/>
           <p:nvPr/>
         </p:nvSpPr>
         <p:spPr>
           <a:xfrm>
-            <a:off x="777240" y="640080"/>
-            <a:ext cx="10058400" cy="457200"/>
+            <a:off x="1188720" y="566928"/>
+            <a:ext cx="7315200" cy="411480"/>
           </a:xfrm>
           <a:prstGeom prst="rect">
             <a:avLst/>
@@ -4519,6 +4789,9 @@
           <a:lstStyle/>
           <a:p>
             <a:pPr algn="l">
+              <a:spcBef>
+                <a:spcPts val="0"/>
+              </a:spcBef>
               <a:spcAft>
                 <a:spcPts val="600"/>
               </a:spcAft>
@@ -4537,14 +4810,14 @@
       </p:sp>
       <p:sp>
         <p:nvSpPr>
-          <p:cNvPr id="4" name="TextBox 3"/>
+          <p:cNvPr id="5" name="TextBox 4"/>
           <p:cNvSpPr txBox="1"/>
           <p:nvPr/>
         </p:nvSpPr>
         <p:spPr>
           <a:xfrm>
-            <a:off x="777240" y="1280160"/>
-            <a:ext cx="10607040" cy="1645920"/>
+            <a:off x="777240" y="1143000"/>
+            <a:ext cx="5577840" cy="1828800"/>
           </a:xfrm>
           <a:prstGeom prst="rect">
             <a:avLst/>
@@ -4558,12 +4831,15 @@
           <a:lstStyle/>
           <a:p>
             <a:pPr algn="l">
+              <a:spcBef>
+                <a:spcPts val="0"/>
+              </a:spcBef>
               <a:spcAft>
                 <a:spcPts val="0"/>
               </a:spcAft>
             </a:pPr>
             <a:r>
-              <a:rPr sz="3800" b="1" i="0">
+              <a:rPr sz="3400" b="1" i="0">
                 <a:solidFill>
                   <a:srgbClr val="EAF0FA"/>
                 </a:solidFill>
@@ -4576,24 +4852,22 @@
       </p:sp>
       <p:sp>
         <p:nvSpPr>
-          <p:cNvPr id="5" name="Rounded Rectangle 4"/>
+          <p:cNvPr id="6" name="Rounded Rectangle 5"/>
           <p:cNvSpPr/>
           <p:nvPr/>
         </p:nvSpPr>
         <p:spPr>
           <a:xfrm>
-            <a:off x="777240" y="2743200"/>
-            <a:ext cx="3410712" cy="2468880"/>
+            <a:off x="777240" y="2468880"/>
+            <a:ext cx="3611880" cy="3749039"/>
           </a:xfrm>
           <a:prstGeom prst="roundRect">
-            <a:avLst>
-              <a:gd name="adj" fmla="val 6000"/>
-            </a:avLst>
+            <a:avLst/>
           </a:prstGeom>
           <a:solidFill>
             <a:srgbClr val="141D33"/>
           </a:solidFill>
-          <a:ln w="12700">
+          <a:ln>
             <a:solidFill>
               <a:srgbClr val="243150"/>
             </a:solidFill>
@@ -4615,18 +4889,71 @@
           </a:fontRef>
         </p:style>
         <p:txBody>
-          <a:bodyPr rtlCol="0" anchor="ctr" wrap="square" lIns="201168" rIns="201168" tIns="182880" bIns="182880"/>
+          <a:bodyPr rtlCol="0" anchor="ctr"/>
+          <a:lstStyle/>
+          <a:p>
+            <a:pPr algn="ctr"/>
+          </a:p>
+        </p:txBody>
+      </p:sp>
+      <p:pic>
+        <p:nvPicPr>
+          <p:cNvPr id="7" name="Picture 6" descr="c_bmx.png"/>
+          <p:cNvPicPr>
+            <a:picLocks noChangeAspect="1"/>
+          </p:cNvPicPr>
+          <p:nvPr/>
+        </p:nvPicPr>
+        <p:blipFill>
+          <a:blip r:embed="rId2"/>
+          <a:stretch>
+            <a:fillRect/>
+          </a:stretch>
+        </p:blipFill>
+        <p:spPr>
+          <a:xfrm>
+            <a:off x="886968" y="2578608"/>
+            <a:ext cx="3392424" cy="2829306"/>
+          </a:xfrm>
+          <a:prstGeom prst="rect">
+            <a:avLst/>
+          </a:prstGeom>
+        </p:spPr>
+      </p:pic>
+      <p:sp>
+        <p:nvSpPr>
+          <p:cNvPr id="8" name="TextBox 7"/>
+          <p:cNvSpPr txBox="1"/>
+          <p:nvPr/>
+        </p:nvSpPr>
+        <p:spPr>
+          <a:xfrm>
+            <a:off x="1005840" y="5481066"/>
+            <a:ext cx="3154680" cy="1097280"/>
+          </a:xfrm>
+          <a:prstGeom prst="rect">
+            <a:avLst/>
+          </a:prstGeom>
+          <a:noFill/>
+        </p:spPr>
+        <p:txBody>
+          <a:bodyPr wrap="square" anchor="t">
+            <a:spAutoFit/>
+          </a:bodyPr>
           <a:lstStyle/>
           <a:p>
             <a:pPr algn="l">
+              <a:spcBef>
+                <a:spcPts val="0"/>
+              </a:spcBef>
               <a:spcAft>
                 <a:spcPts val="400"/>
               </a:spcAft>
             </a:pPr>
             <a:r>
-              <a:rPr sz="3000" b="0" i="0">
-                <a:solidFill>
-                  <a:srgbClr val="FFC107"/>
+              <a:rPr sz="1900" b="1" i="0">
+                <a:solidFill>
+                  <a:srgbClr val="FFFFFF"/>
                 </a:solidFill>
                 <a:latin typeface="Arial"/>
               </a:rPr>
@@ -4635,58 +4962,43 @@
           </a:p>
           <a:p>
             <a:pPr algn="l">
+              <a:spcBef>
+                <a:spcPts val="0"/>
+              </a:spcBef>
               <a:spcAft>
-                <a:spcPts val="500"/>
+                <a:spcPts val="600"/>
               </a:spcAft>
             </a:pPr>
             <a:r>
-              <a:rPr sz="1700" b="1" i="0">
-                <a:solidFill>
-                  <a:srgbClr val="FFFFFF"/>
-                </a:solidFill>
-                <a:latin typeface="Arial"/>
-              </a:rPr>
-              <a:t>Велосипеды</a:t>
-            </a:r>
-          </a:p>
-          <a:p>
-            <a:pPr algn="l">
-              <a:spcAft>
-                <a:spcPts val="0"/>
-              </a:spcAft>
-            </a:pPr>
-            <a:r>
-              <a:rPr sz="1250" b="0" i="0">
+              <a:rPr sz="1400" b="0" i="0">
                 <a:solidFill>
                   <a:srgbClr val="8B9AB8"/>
                 </a:solidFill>
                 <a:latin typeface="Arial"/>
               </a:rPr>
-              <a:t>Трюковые велосипеды — сила, координация и зрелищность.</a:t>
-            </a:r>
-          </a:p>
-        </p:txBody>
-      </p:sp>
-      <p:sp>
-        <p:nvSpPr>
-          <p:cNvPr id="6" name="Rounded Rectangle 5"/>
+              <a:t>Сила, координация и зрелищность.</a:t>
+            </a:r>
+          </a:p>
+        </p:txBody>
+      </p:sp>
+      <p:sp>
+        <p:nvSpPr>
+          <p:cNvPr id="9" name="Rounded Rectangle 8"/>
           <p:cNvSpPr/>
           <p:nvPr/>
         </p:nvSpPr>
         <p:spPr>
           <a:xfrm>
-            <a:off x="4370832" y="2743200"/>
-            <a:ext cx="3410712" cy="2468880"/>
+            <a:off x="4590288" y="2468880"/>
+            <a:ext cx="3611880" cy="3749039"/>
           </a:xfrm>
           <a:prstGeom prst="roundRect">
-            <a:avLst>
-              <a:gd name="adj" fmla="val 6000"/>
-            </a:avLst>
+            <a:avLst/>
           </a:prstGeom>
           <a:solidFill>
             <a:srgbClr val="141D33"/>
           </a:solidFill>
-          <a:ln w="12700">
+          <a:ln>
             <a:solidFill>
               <a:srgbClr val="243150"/>
             </a:solidFill>
@@ -4708,78 +5020,116 @@
           </a:fontRef>
         </p:style>
         <p:txBody>
-          <a:bodyPr rtlCol="0" anchor="ctr" wrap="square" lIns="201168" rIns="201168" tIns="182880" bIns="182880"/>
+          <a:bodyPr rtlCol="0" anchor="ctr"/>
+          <a:lstStyle/>
+          <a:p>
+            <a:pPr algn="ctr"/>
+          </a:p>
+        </p:txBody>
+      </p:sp>
+      <p:pic>
+        <p:nvPicPr>
+          <p:cNvPr id="10" name="Picture 9" descr="c_scooter.png"/>
+          <p:cNvPicPr>
+            <a:picLocks noChangeAspect="1"/>
+          </p:cNvPicPr>
+          <p:nvPr/>
+        </p:nvPicPr>
+        <p:blipFill>
+          <a:blip r:embed="rId3"/>
+          <a:stretch>
+            <a:fillRect/>
+          </a:stretch>
+        </p:blipFill>
+        <p:spPr>
+          <a:xfrm>
+            <a:off x="4700016" y="2578608"/>
+            <a:ext cx="3392424" cy="2829306"/>
+          </a:xfrm>
+          <a:prstGeom prst="rect">
+            <a:avLst/>
+          </a:prstGeom>
+        </p:spPr>
+      </p:pic>
+      <p:sp>
+        <p:nvSpPr>
+          <p:cNvPr id="11" name="TextBox 10"/>
+          <p:cNvSpPr txBox="1"/>
+          <p:nvPr/>
+        </p:nvSpPr>
+        <p:spPr>
+          <a:xfrm>
+            <a:off x="4818888" y="5481066"/>
+            <a:ext cx="3154680" cy="1097280"/>
+          </a:xfrm>
+          <a:prstGeom prst="rect">
+            <a:avLst/>
+          </a:prstGeom>
+          <a:noFill/>
+        </p:spPr>
+        <p:txBody>
+          <a:bodyPr wrap="square" anchor="t">
+            <a:spAutoFit/>
+          </a:bodyPr>
           <a:lstStyle/>
           <a:p>
             <a:pPr algn="l">
+              <a:spcBef>
+                <a:spcPts val="0"/>
+              </a:spcBef>
               <a:spcAft>
                 <a:spcPts val="400"/>
               </a:spcAft>
             </a:pPr>
             <a:r>
-              <a:rPr sz="3000" b="0" i="0">
-                <a:solidFill>
-                  <a:srgbClr val="FFC107"/>
-                </a:solidFill>
-                <a:latin typeface="Arial"/>
-              </a:rPr>
-              <a:t>◔</a:t>
+              <a:rPr sz="1900" b="1" i="0">
+                <a:solidFill>
+                  <a:srgbClr val="FFFFFF"/>
+                </a:solidFill>
+                <a:latin typeface="Arial"/>
+              </a:rPr>
+              <a:t>Трюковой самокат</a:t>
             </a:r>
           </a:p>
           <a:p>
             <a:pPr algn="l">
+              <a:spcBef>
+                <a:spcPts val="0"/>
+              </a:spcBef>
               <a:spcAft>
-                <a:spcPts val="500"/>
+                <a:spcPts val="600"/>
               </a:spcAft>
             </a:pPr>
             <a:r>
-              <a:rPr sz="1700" b="1" i="0">
-                <a:solidFill>
-                  <a:srgbClr val="FFFFFF"/>
-                </a:solidFill>
-                <a:latin typeface="Arial"/>
-              </a:rPr>
-              <a:t>Трюковой самокат</a:t>
-            </a:r>
-          </a:p>
-          <a:p>
-            <a:pPr algn="l">
-              <a:spcAft>
-                <a:spcPts val="0"/>
-              </a:spcAft>
-            </a:pPr>
-            <a:r>
-              <a:rPr sz="1250" b="0" i="0">
+              <a:rPr sz="1400" b="0" i="0">
                 <a:solidFill>
                   <a:srgbClr val="8B9AB8"/>
                 </a:solidFill>
                 <a:latin typeface="Arial"/>
               </a:rPr>
-              <a:t>Самый популярный и доступный старт для детей.</a:t>
-            </a:r>
-          </a:p>
-        </p:txBody>
-      </p:sp>
-      <p:sp>
-        <p:nvSpPr>
-          <p:cNvPr id="7" name="Rounded Rectangle 6"/>
+              <a:t>Доступный старт для детей.</a:t>
+            </a:r>
+          </a:p>
+        </p:txBody>
+      </p:sp>
+      <p:sp>
+        <p:nvSpPr>
+          <p:cNvPr id="12" name="Rounded Rectangle 11"/>
           <p:cNvSpPr/>
           <p:nvPr/>
         </p:nvSpPr>
         <p:spPr>
           <a:xfrm>
-            <a:off x="7964424" y="2743200"/>
-            <a:ext cx="3410712" cy="2468880"/>
+            <a:off x="8403336" y="2468880"/>
+            <a:ext cx="3611880" cy="3749039"/>
           </a:xfrm>
           <a:prstGeom prst="roundRect">
-            <a:avLst>
-              <a:gd name="adj" fmla="val 6000"/>
-            </a:avLst>
+            <a:avLst/>
           </a:prstGeom>
           <a:solidFill>
             <a:srgbClr val="141D33"/>
           </a:solidFill>
-          <a:ln w="12700">
+          <a:ln>
             <a:solidFill>
               <a:srgbClr val="243150"/>
             </a:solidFill>
@@ -4801,89 +5151,132 @@
           </a:fontRef>
         </p:style>
         <p:txBody>
-          <a:bodyPr rtlCol="0" anchor="ctr" wrap="square" lIns="201168" rIns="201168" tIns="182880" bIns="182880"/>
+          <a:bodyPr rtlCol="0" anchor="ctr"/>
+          <a:lstStyle/>
+          <a:p>
+            <a:pPr algn="ctr"/>
+          </a:p>
+        </p:txBody>
+      </p:sp>
+      <p:pic>
+        <p:nvPicPr>
+          <p:cNvPr id="13" name="Picture 12" descr="c_skate.png"/>
+          <p:cNvPicPr>
+            <a:picLocks noChangeAspect="1"/>
+          </p:cNvPicPr>
+          <p:nvPr/>
+        </p:nvPicPr>
+        <p:blipFill>
+          <a:blip r:embed="rId4"/>
+          <a:stretch>
+            <a:fillRect/>
+          </a:stretch>
+        </p:blipFill>
+        <p:spPr>
+          <a:xfrm>
+            <a:off x="8513064" y="2578608"/>
+            <a:ext cx="3392424" cy="2829306"/>
+          </a:xfrm>
+          <a:prstGeom prst="rect">
+            <a:avLst/>
+          </a:prstGeom>
+        </p:spPr>
+      </p:pic>
+      <p:sp>
+        <p:nvSpPr>
+          <p:cNvPr id="14" name="TextBox 13"/>
+          <p:cNvSpPr txBox="1"/>
+          <p:nvPr/>
+        </p:nvSpPr>
+        <p:spPr>
+          <a:xfrm>
+            <a:off x="8631936" y="5481066"/>
+            <a:ext cx="3154680" cy="1097280"/>
+          </a:xfrm>
+          <a:prstGeom prst="rect">
+            <a:avLst/>
+          </a:prstGeom>
+          <a:noFill/>
+        </p:spPr>
+        <p:txBody>
+          <a:bodyPr wrap="square" anchor="t">
+            <a:spAutoFit/>
+          </a:bodyPr>
           <a:lstStyle/>
           <a:p>
             <a:pPr algn="l">
+              <a:spcBef>
+                <a:spcPts val="0"/>
+              </a:spcBef>
               <a:spcAft>
                 <a:spcPts val="400"/>
               </a:spcAft>
             </a:pPr>
             <a:r>
-              <a:rPr sz="3000" b="0" i="0">
-                <a:solidFill>
-                  <a:srgbClr val="FFC107"/>
-                </a:solidFill>
-                <a:latin typeface="Arial"/>
-              </a:rPr>
-              <a:t>▱</a:t>
+              <a:rPr sz="1900" b="1" i="0">
+                <a:solidFill>
+                  <a:srgbClr val="FFFFFF"/>
+                </a:solidFill>
+                <a:latin typeface="Arial"/>
+              </a:rPr>
+              <a:t>Скейтборд</a:t>
             </a:r>
           </a:p>
           <a:p>
             <a:pPr algn="l">
-              <a:spcAft>
-                <a:spcPts val="500"/>
-              </a:spcAft>
-            </a:pPr>
-            <a:r>
-              <a:rPr sz="1700" b="1" i="0">
-                <a:solidFill>
-                  <a:srgbClr val="FFFFFF"/>
-                </a:solidFill>
-                <a:latin typeface="Arial"/>
-              </a:rPr>
-              <a:t>Скейтборд</a:t>
-            </a:r>
-          </a:p>
-          <a:p>
-            <a:pPr algn="l">
-              <a:spcAft>
+              <a:spcBef>
                 <a:spcPts val="0"/>
-              </a:spcAft>
-            </a:pPr>
-            <a:r>
-              <a:rPr sz="1250" b="0" i="0">
-                <a:solidFill>
-                  <a:srgbClr val="8B9AB8"/>
-                </a:solidFill>
-                <a:latin typeface="Arial"/>
-              </a:rPr>
-              <a:t>Классика уличного спорта: баланс и чувство тела.</a:t>
-            </a:r>
-          </a:p>
-        </p:txBody>
-      </p:sp>
-      <p:sp>
-        <p:nvSpPr>
-          <p:cNvPr id="8" name="TextBox 7"/>
-          <p:cNvSpPr txBox="1"/>
-          <p:nvPr/>
-        </p:nvSpPr>
-        <p:spPr>
-          <a:xfrm>
-            <a:off x="777240" y="5577840"/>
-            <a:ext cx="10058400" cy="731520"/>
-          </a:xfrm>
-          <a:prstGeom prst="rect">
-            <a:avLst/>
-          </a:prstGeom>
-          <a:noFill/>
-        </p:spPr>
-        <p:txBody>
-          <a:bodyPr wrap="square" anchor="t">
-            <a:spAutoFit/>
-          </a:bodyPr>
-          <a:lstStyle/>
-          <a:p>
-            <a:pPr algn="l">
+              </a:spcBef>
               <a:spcAft>
                 <a:spcPts val="600"/>
               </a:spcAft>
             </a:pPr>
             <a:r>
-              <a:rPr sz="1900" b="0" i="0">
+              <a:rPr sz="1400" b="0" i="0">
                 <a:solidFill>
                   <a:srgbClr val="8B9AB8"/>
+                </a:solidFill>
+                <a:latin typeface="Arial"/>
+              </a:rPr>
+              <a:t>Баланс и чувство тела.</a:t>
+            </a:r>
+          </a:p>
+        </p:txBody>
+      </p:sp>
+      <p:sp>
+        <p:nvSpPr>
+          <p:cNvPr id="15" name="TextBox 14"/>
+          <p:cNvSpPr txBox="1"/>
+          <p:nvPr/>
+        </p:nvSpPr>
+        <p:spPr>
+          <a:xfrm>
+            <a:off x="777240" y="6355080"/>
+            <a:ext cx="10607040" cy="457200"/>
+          </a:xfrm>
+          <a:prstGeom prst="rect">
+            <a:avLst/>
+          </a:prstGeom>
+          <a:noFill/>
+        </p:spPr>
+        <p:txBody>
+          <a:bodyPr wrap="square" anchor="t">
+            <a:spAutoFit/>
+          </a:bodyPr>
+          <a:lstStyle/>
+          <a:p>
+            <a:pPr algn="l">
+              <a:spcBef>
+                <a:spcPts val="0"/>
+              </a:spcBef>
+              <a:spcAft>
+                <a:spcPts val="600"/>
+              </a:spcAft>
+            </a:pPr>
+            <a:r>
+              <a:rPr sz="1600" b="0" i="0">
+                <a:solidFill>
+                  <a:srgbClr val="FFC107"/>
                 </a:solidFill>
                 <a:latin typeface="Arial"/>
               </a:rPr>
@@ -4956,94 +5349,16 @@
       </p:sp>
       <p:sp>
         <p:nvSpPr>
-          <p:cNvPr id="3" name="TextBox 2"/>
-          <p:cNvSpPr txBox="1"/>
-          <p:nvPr/>
-        </p:nvSpPr>
-        <p:spPr>
-          <a:xfrm>
-            <a:off x="777240" y="640080"/>
-            <a:ext cx="10058400" cy="457200"/>
+          <p:cNvPr id="3" name="Rectangle 2"/>
+          <p:cNvSpPr/>
+          <p:nvPr/>
+        </p:nvSpPr>
+        <p:spPr>
+          <a:xfrm>
+            <a:off x="777240" y="649224"/>
+            <a:ext cx="310896" cy="38100"/>
           </a:xfrm>
           <a:prstGeom prst="rect">
-            <a:avLst/>
-          </a:prstGeom>
-          <a:noFill/>
-        </p:spPr>
-        <p:txBody>
-          <a:bodyPr wrap="square" anchor="t">
-            <a:spAutoFit/>
-          </a:bodyPr>
-          <a:lstStyle/>
-          <a:p>
-            <a:pPr algn="l">
-              <a:spcAft>
-                <a:spcPts val="600"/>
-              </a:spcAft>
-            </a:pPr>
-            <a:r>
-              <a:rPr sz="1400" b="1" i="0">
-                <a:solidFill>
-                  <a:srgbClr val="FFC107"/>
-                </a:solidFill>
-                <a:latin typeface="Arial"/>
-              </a:rPr>
-              <a:t>ГЛАВНЫЙ ПРИОРИТЕТ</a:t>
-            </a:r>
-          </a:p>
-        </p:txBody>
-      </p:sp>
-      <p:sp>
-        <p:nvSpPr>
-          <p:cNvPr id="4" name="TextBox 3"/>
-          <p:cNvSpPr txBox="1"/>
-          <p:nvPr/>
-        </p:nvSpPr>
-        <p:spPr>
-          <a:xfrm>
-            <a:off x="777240" y="1188720"/>
-            <a:ext cx="10607040" cy="1645920"/>
-          </a:xfrm>
-          <a:prstGeom prst="rect">
-            <a:avLst/>
-          </a:prstGeom>
-          <a:noFill/>
-        </p:spPr>
-        <p:txBody>
-          <a:bodyPr wrap="square" anchor="t">
-            <a:spAutoFit/>
-          </a:bodyPr>
-          <a:lstStyle/>
-          <a:p>
-            <a:pPr algn="l">
-              <a:spcAft>
-                <a:spcPts val="0"/>
-              </a:spcAft>
-            </a:pPr>
-            <a:r>
-              <a:rPr sz="4000" b="1" i="0">
-                <a:solidFill>
-                  <a:srgbClr val="FF5722"/>
-                </a:solidFill>
-                <a:latin typeface="Arial"/>
-              </a:rPr>
-              <a:t>Безопасность прежде всего</a:t>
-            </a:r>
-          </a:p>
-        </p:txBody>
-      </p:sp>
-      <p:sp>
-        <p:nvSpPr>
-          <p:cNvPr id="5" name="Rounded Rectangle 4"/>
-          <p:cNvSpPr/>
-          <p:nvPr/>
-        </p:nvSpPr>
-        <p:spPr>
-          <a:xfrm>
-            <a:off x="777240" y="2468880"/>
-            <a:ext cx="502920" cy="502920"/>
-          </a:xfrm>
-          <a:prstGeom prst="roundRect">
             <a:avLst/>
           </a:prstGeom>
           <a:solidFill>
@@ -5073,28 +5388,19 @@
           <a:lstStyle/>
           <a:p>
             <a:pPr algn="ctr"/>
-            <a:r>
-              <a:rPr sz="2000" b="1" i="0">
-                <a:solidFill>
-                  <a:srgbClr val="1A1205"/>
-                </a:solidFill>
-                <a:latin typeface="Arial"/>
-              </a:rPr>
-              <a:t>1</a:t>
-            </a:r>
-          </a:p>
-        </p:txBody>
-      </p:sp>
-      <p:sp>
-        <p:nvSpPr>
-          <p:cNvPr id="6" name="TextBox 5"/>
+          </a:p>
+        </p:txBody>
+      </p:sp>
+      <p:sp>
+        <p:nvSpPr>
+          <p:cNvPr id="4" name="TextBox 3"/>
           <p:cNvSpPr txBox="1"/>
           <p:nvPr/>
         </p:nvSpPr>
         <p:spPr>
           <a:xfrm>
-            <a:off x="1463040" y="2423160"/>
-            <a:ext cx="9875520" cy="640080"/>
+            <a:off x="1188720" y="566928"/>
+            <a:ext cx="7315200" cy="411480"/>
           </a:xfrm>
           <a:prstGeom prst="rect">
             <a:avLst/>
@@ -5102,47 +5408,83 @@
           <a:noFill/>
         </p:spPr>
         <p:txBody>
-          <a:bodyPr wrap="square" anchor="ctr">
+          <a:bodyPr wrap="square" anchor="t">
             <a:spAutoFit/>
           </a:bodyPr>
           <a:lstStyle/>
           <a:p>
-            <a:pPr>
+            <a:pPr algn="l">
+              <a:spcBef>
+                <a:spcPts val="0"/>
+              </a:spcBef>
+              <a:spcAft>
+                <a:spcPts val="600"/>
+              </a:spcAft>
+            </a:pPr>
+            <a:r>
+              <a:rPr sz="1400" b="1" i="0">
+                <a:solidFill>
+                  <a:srgbClr val="FFC107"/>
+                </a:solidFill>
+                <a:latin typeface="Arial"/>
+              </a:rPr>
+              <a:t>ГЛАВНЫЙ ПРИОРИТЕТ</a:t>
+            </a:r>
+          </a:p>
+        </p:txBody>
+      </p:sp>
+      <p:sp>
+        <p:nvSpPr>
+          <p:cNvPr id="5" name="TextBox 4"/>
+          <p:cNvSpPr txBox="1"/>
+          <p:nvPr/>
+        </p:nvSpPr>
+        <p:spPr>
+          <a:xfrm>
+            <a:off x="777240" y="1188720"/>
+            <a:ext cx="5577840" cy="1828800"/>
+          </a:xfrm>
+          <a:prstGeom prst="rect">
+            <a:avLst/>
+          </a:prstGeom>
+          <a:noFill/>
+        </p:spPr>
+        <p:txBody>
+          <a:bodyPr wrap="square" anchor="t">
+            <a:spAutoFit/>
+          </a:bodyPr>
+          <a:lstStyle/>
+          <a:p>
+            <a:pPr algn="l">
+              <a:spcBef>
+                <a:spcPts val="0"/>
+              </a:spcBef>
               <a:spcAft>
                 <a:spcPts val="0"/>
               </a:spcAft>
             </a:pPr>
             <a:r>
-              <a:rPr sz="1600" b="1" i="0">
-                <a:solidFill>
-                  <a:srgbClr val="FFFFFF"/>
-                </a:solidFill>
-                <a:latin typeface="Arial"/>
-              </a:rPr>
-              <a:t>Защитная экипировка.  </a:t>
-            </a:r>
-            <a:r>
-              <a:rPr sz="1400" b="0" i="0">
-                <a:solidFill>
-                  <a:srgbClr val="8B9AB8"/>
-                </a:solidFill>
-                <a:latin typeface="Arial"/>
-              </a:rPr>
-              <a:t>Шлемы, наколенники, налокотники и перчатки — обязательны для всех.</a:t>
-            </a:r>
-          </a:p>
-        </p:txBody>
-      </p:sp>
-      <p:sp>
-        <p:nvSpPr>
-          <p:cNvPr id="7" name="Rounded Rectangle 6"/>
+              <a:rPr sz="3600" b="1" i="0">
+                <a:solidFill>
+                  <a:srgbClr val="FF5722"/>
+                </a:solidFill>
+                <a:latin typeface="Arial"/>
+              </a:rPr>
+              <a:t>Безопасность прежде всего</a:t>
+            </a:r>
+          </a:p>
+        </p:txBody>
+      </p:sp>
+      <p:sp>
+        <p:nvSpPr>
+          <p:cNvPr id="6" name="Rounded Rectangle 5"/>
           <p:cNvSpPr/>
           <p:nvPr/>
         </p:nvSpPr>
         <p:spPr>
           <a:xfrm>
-            <a:off x="777240" y="3429000"/>
-            <a:ext cx="502920" cy="502920"/>
+            <a:off x="822960" y="2331720"/>
+            <a:ext cx="457200" cy="457200"/>
           </a:xfrm>
           <a:prstGeom prst="roundRect">
             <a:avLst/>
@@ -5175,27 +5517,27 @@
           <a:p>
             <a:pPr algn="ctr"/>
             <a:r>
-              <a:rPr sz="2000" b="1" i="0">
-                <a:solidFill>
-                  <a:srgbClr val="1A1205"/>
-                </a:solidFill>
-                <a:latin typeface="Arial"/>
-              </a:rPr>
-              <a:t>2</a:t>
-            </a:r>
-          </a:p>
-        </p:txBody>
-      </p:sp>
-      <p:sp>
-        <p:nvSpPr>
-          <p:cNvPr id="8" name="TextBox 7"/>
+              <a:rPr sz="1800" b="1" i="0">
+                <a:solidFill>
+                  <a:srgbClr val="0A0E1A"/>
+                </a:solidFill>
+                <a:latin typeface="Arial"/>
+              </a:rPr>
+              <a:t>1</a:t>
+            </a:r>
+          </a:p>
+        </p:txBody>
+      </p:sp>
+      <p:sp>
+        <p:nvSpPr>
+          <p:cNvPr id="7" name="TextBox 6"/>
           <p:cNvSpPr txBox="1"/>
           <p:nvPr/>
         </p:nvSpPr>
         <p:spPr>
           <a:xfrm>
-            <a:off x="1463040" y="3383280"/>
-            <a:ext cx="9875520" cy="640080"/>
+            <a:off x="1417320" y="2286000"/>
+            <a:ext cx="4846320" cy="640080"/>
           </a:xfrm>
           <a:prstGeom prst="rect">
             <a:avLst/>
@@ -5214,36 +5556,36 @@
               </a:spcAft>
             </a:pPr>
             <a:r>
-              <a:rPr sz="1600" b="1" i="0">
+              <a:rPr sz="1500" b="1" i="0">
                 <a:solidFill>
                   <a:srgbClr val="FFFFFF"/>
                 </a:solidFill>
                 <a:latin typeface="Arial"/>
               </a:rPr>
-              <a:t>Безопасное покрытие.  </a:t>
-            </a:r>
-            <a:r>
-              <a:rPr sz="1400" b="0" i="0">
+              <a:t>Защитная экипировка. </a:t>
+            </a:r>
+            <a:r>
+              <a:rPr sz="1350" b="0" i="0">
                 <a:solidFill>
                   <a:srgbClr val="8B9AB8"/>
                 </a:solidFill>
                 <a:latin typeface="Arial"/>
               </a:rPr>
-              <a:t>Сертифицированные материалы, продуманные радиусы фигур, без острых углов.</a:t>
-            </a:r>
-          </a:p>
-        </p:txBody>
-      </p:sp>
-      <p:sp>
-        <p:nvSpPr>
-          <p:cNvPr id="9" name="Rounded Rectangle 8"/>
+              <a:t>Шлемы, наколенники, налокотники, перчатки — для всех.</a:t>
+            </a:r>
+          </a:p>
+        </p:txBody>
+      </p:sp>
+      <p:sp>
+        <p:nvSpPr>
+          <p:cNvPr id="8" name="Rounded Rectangle 7"/>
           <p:cNvSpPr/>
           <p:nvPr/>
         </p:nvSpPr>
         <p:spPr>
           <a:xfrm>
-            <a:off x="777240" y="4389120"/>
-            <a:ext cx="502920" cy="502920"/>
+            <a:off x="822960" y="3264408"/>
+            <a:ext cx="457200" cy="457200"/>
           </a:xfrm>
           <a:prstGeom prst="roundRect">
             <a:avLst/>
@@ -5276,27 +5618,27 @@
           <a:p>
             <a:pPr algn="ctr"/>
             <a:r>
-              <a:rPr sz="2000" b="1" i="0">
-                <a:solidFill>
-                  <a:srgbClr val="1A1205"/>
-                </a:solidFill>
-                <a:latin typeface="Arial"/>
-              </a:rPr>
-              <a:t>3</a:t>
-            </a:r>
-          </a:p>
-        </p:txBody>
-      </p:sp>
-      <p:sp>
-        <p:nvSpPr>
-          <p:cNvPr id="10" name="TextBox 9"/>
+              <a:rPr sz="1800" b="1" i="0">
+                <a:solidFill>
+                  <a:srgbClr val="0A0E1A"/>
+                </a:solidFill>
+                <a:latin typeface="Arial"/>
+              </a:rPr>
+              <a:t>2</a:t>
+            </a:r>
+          </a:p>
+        </p:txBody>
+      </p:sp>
+      <p:sp>
+        <p:nvSpPr>
+          <p:cNvPr id="9" name="TextBox 8"/>
           <p:cNvSpPr txBox="1"/>
           <p:nvPr/>
         </p:nvSpPr>
         <p:spPr>
           <a:xfrm>
-            <a:off x="1463040" y="4343400"/>
-            <a:ext cx="9875520" cy="640080"/>
+            <a:off x="1417320" y="3218688"/>
+            <a:ext cx="4846320" cy="640080"/>
           </a:xfrm>
           <a:prstGeom prst="rect">
             <a:avLst/>
@@ -5315,36 +5657,36 @@
               </a:spcAft>
             </a:pPr>
             <a:r>
-              <a:rPr sz="1600" b="1" i="0">
+              <a:rPr sz="1500" b="1" i="0">
                 <a:solidFill>
                   <a:srgbClr val="FFFFFF"/>
                 </a:solidFill>
                 <a:latin typeface="Arial"/>
               </a:rPr>
-              <a:t>Зонирование.  </a:t>
-            </a:r>
-            <a:r>
-              <a:rPr sz="1400" b="0" i="0">
+              <a:t>Безопасное покрытие. </a:t>
+            </a:r>
+            <a:r>
+              <a:rPr sz="1350" b="0" i="0">
                 <a:solidFill>
                   <a:srgbClr val="8B9AB8"/>
                 </a:solidFill>
                 <a:latin typeface="Arial"/>
               </a:rPr>
-              <a:t>Раздельные зоны для новичков и опытных, чтобы потоки не пересекались.</a:t>
-            </a:r>
-          </a:p>
-        </p:txBody>
-      </p:sp>
-      <p:sp>
-        <p:nvSpPr>
-          <p:cNvPr id="11" name="Rounded Rectangle 10"/>
+              <a:t>Сертифицированные материалы, без острых углов.</a:t>
+            </a:r>
+          </a:p>
+        </p:txBody>
+      </p:sp>
+      <p:sp>
+        <p:nvSpPr>
+          <p:cNvPr id="10" name="Rounded Rectangle 9"/>
           <p:cNvSpPr/>
           <p:nvPr/>
         </p:nvSpPr>
         <p:spPr>
           <a:xfrm>
-            <a:off x="777240" y="5349240"/>
-            <a:ext cx="502920" cy="502920"/>
+            <a:off x="822960" y="4197096"/>
+            <a:ext cx="457200" cy="457200"/>
           </a:xfrm>
           <a:prstGeom prst="roundRect">
             <a:avLst/>
@@ -5377,27 +5719,27 @@
           <a:p>
             <a:pPr algn="ctr"/>
             <a:r>
-              <a:rPr sz="2000" b="1" i="0">
-                <a:solidFill>
-                  <a:srgbClr val="1A1205"/>
-                </a:solidFill>
-                <a:latin typeface="Arial"/>
-              </a:rPr>
-              <a:t>4</a:t>
-            </a:r>
-          </a:p>
-        </p:txBody>
-      </p:sp>
-      <p:sp>
-        <p:nvSpPr>
-          <p:cNvPr id="12" name="TextBox 11"/>
+              <a:rPr sz="1800" b="1" i="0">
+                <a:solidFill>
+                  <a:srgbClr val="0A0E1A"/>
+                </a:solidFill>
+                <a:latin typeface="Arial"/>
+              </a:rPr>
+              <a:t>3</a:t>
+            </a:r>
+          </a:p>
+        </p:txBody>
+      </p:sp>
+      <p:sp>
+        <p:nvSpPr>
+          <p:cNvPr id="11" name="TextBox 10"/>
           <p:cNvSpPr txBox="1"/>
           <p:nvPr/>
         </p:nvSpPr>
         <p:spPr>
           <a:xfrm>
-            <a:off x="1463040" y="5303520"/>
-            <a:ext cx="9875520" cy="640080"/>
+            <a:off x="1417320" y="4151376"/>
+            <a:ext cx="4846320" cy="640080"/>
           </a:xfrm>
           <a:prstGeom prst="rect">
             <a:avLst/>
@@ -5416,26 +5758,156 @@
               </a:spcAft>
             </a:pPr>
             <a:r>
-              <a:rPr sz="1600" b="1" i="0">
+              <a:rPr sz="1500" b="1" i="0">
                 <a:solidFill>
                   <a:srgbClr val="FFFFFF"/>
                 </a:solidFill>
                 <a:latin typeface="Arial"/>
               </a:rPr>
-              <a:t>Освещение и аптечка.  </a:t>
-            </a:r>
-            <a:r>
-              <a:rPr sz="1400" b="0" i="0">
+              <a:t>Зонирование. </a:t>
+            </a:r>
+            <a:r>
+              <a:rPr sz="1350" b="0" i="0">
                 <a:solidFill>
                   <a:srgbClr val="8B9AB8"/>
                 </a:solidFill>
                 <a:latin typeface="Arial"/>
               </a:rPr>
-              <a:t>Хороший свет вечером и медпункт первой помощи прямо на месте.</a:t>
-            </a:r>
-          </a:p>
-        </p:txBody>
-      </p:sp>
+              <a:t>Раздельные зоны для новичков и опытных.</a:t>
+            </a:r>
+          </a:p>
+        </p:txBody>
+      </p:sp>
+      <p:sp>
+        <p:nvSpPr>
+          <p:cNvPr id="12" name="Rounded Rectangle 11"/>
+          <p:cNvSpPr/>
+          <p:nvPr/>
+        </p:nvSpPr>
+        <p:spPr>
+          <a:xfrm>
+            <a:off x="822960" y="5129784"/>
+            <a:ext cx="457200" cy="457200"/>
+          </a:xfrm>
+          <a:prstGeom prst="roundRect">
+            <a:avLst/>
+          </a:prstGeom>
+          <a:solidFill>
+            <a:srgbClr val="FF5722"/>
+          </a:solidFill>
+          <a:ln>
+            <a:noFill/>
+          </a:ln>
+          <a:effectLst/>
+        </p:spPr>
+        <p:style>
+          <a:lnRef idx="1">
+            <a:schemeClr val="accent1"/>
+          </a:lnRef>
+          <a:fillRef idx="3">
+            <a:schemeClr val="accent1"/>
+          </a:fillRef>
+          <a:effectRef idx="2">
+            <a:schemeClr val="accent1"/>
+          </a:effectRef>
+          <a:fontRef idx="minor">
+            <a:schemeClr val="lt1"/>
+          </a:fontRef>
+        </p:style>
+        <p:txBody>
+          <a:bodyPr rtlCol="0" anchor="ctr"/>
+          <a:lstStyle/>
+          <a:p>
+            <a:pPr algn="ctr"/>
+            <a:r>
+              <a:rPr sz="1800" b="1" i="0">
+                <a:solidFill>
+                  <a:srgbClr val="0A0E1A"/>
+                </a:solidFill>
+                <a:latin typeface="Arial"/>
+              </a:rPr>
+              <a:t>4</a:t>
+            </a:r>
+          </a:p>
+        </p:txBody>
+      </p:sp>
+      <p:sp>
+        <p:nvSpPr>
+          <p:cNvPr id="13" name="TextBox 12"/>
+          <p:cNvSpPr txBox="1"/>
+          <p:nvPr/>
+        </p:nvSpPr>
+        <p:spPr>
+          <a:xfrm>
+            <a:off x="1417320" y="5084064"/>
+            <a:ext cx="4846320" cy="640080"/>
+          </a:xfrm>
+          <a:prstGeom prst="rect">
+            <a:avLst/>
+          </a:prstGeom>
+          <a:noFill/>
+        </p:spPr>
+        <p:txBody>
+          <a:bodyPr wrap="square" anchor="ctr">
+            <a:spAutoFit/>
+          </a:bodyPr>
+          <a:lstStyle/>
+          <a:p>
+            <a:pPr>
+              <a:spcAft>
+                <a:spcPts val="0"/>
+              </a:spcAft>
+            </a:pPr>
+            <a:r>
+              <a:rPr sz="1500" b="1" i="0">
+                <a:solidFill>
+                  <a:srgbClr val="FFFFFF"/>
+                </a:solidFill>
+                <a:latin typeface="Arial"/>
+              </a:rPr>
+              <a:t>Освещение и аптечка. </a:t>
+            </a:r>
+            <a:r>
+              <a:rPr sz="1350" b="0" i="0">
+                <a:solidFill>
+                  <a:srgbClr val="8B9AB8"/>
+                </a:solidFill>
+                <a:latin typeface="Arial"/>
+              </a:rPr>
+              <a:t>Свет вечером и медпункт первой помощи на месте.</a:t>
+            </a:r>
+          </a:p>
+        </p:txBody>
+      </p:sp>
+      <p:pic>
+        <p:nvPicPr>
+          <p:cNvPr id="14" name="Picture 13" descr="safety.png"/>
+          <p:cNvPicPr>
+            <a:picLocks noChangeAspect="1"/>
+          </p:cNvPicPr>
+          <p:nvPr/>
+        </p:nvPicPr>
+        <p:blipFill>
+          <a:blip r:embed="rId2"/>
+          <a:stretch>
+            <a:fillRect/>
+          </a:stretch>
+        </p:blipFill>
+        <p:spPr>
+          <a:xfrm>
+            <a:off x="6355080" y="2194560"/>
+            <a:ext cx="5212080" cy="3350622"/>
+          </a:xfrm>
+          <a:prstGeom prst="rect">
+            <a:avLst/>
+          </a:prstGeom>
+          <a:ln w="15875">
+            <a:solidFill>
+              <a:srgbClr val="243150"/>
+            </a:solidFill>
+          </a:ln>
+        </p:spPr>
+      </p:pic>
     </p:spTree>
   </p:cSld>
   <p:clrMapOvr>
@@ -5500,148 +5972,23 @@
       </p:sp>
       <p:sp>
         <p:nvSpPr>
-          <p:cNvPr id="3" name="TextBox 2"/>
-          <p:cNvSpPr txBox="1"/>
-          <p:nvPr/>
-        </p:nvSpPr>
-        <p:spPr>
-          <a:xfrm>
-            <a:off x="777240" y="640080"/>
-            <a:ext cx="10058400" cy="457200"/>
+          <p:cNvPr id="3" name="Rectangle 2"/>
+          <p:cNvSpPr/>
+          <p:nvPr/>
+        </p:nvSpPr>
+        <p:spPr>
+          <a:xfrm>
+            <a:off x="777240" y="649224"/>
+            <a:ext cx="310896" cy="38100"/>
           </a:xfrm>
           <a:prstGeom prst="rect">
             <a:avLst/>
           </a:prstGeom>
-          <a:noFill/>
-        </p:spPr>
-        <p:txBody>
-          <a:bodyPr wrap="square" anchor="t">
-            <a:spAutoFit/>
-          </a:bodyPr>
-          <a:lstStyle/>
-          <a:p>
-            <a:pPr algn="l">
-              <a:spcAft>
-                <a:spcPts val="600"/>
-              </a:spcAft>
-            </a:pPr>
-            <a:r>
-              <a:rPr sz="1400" b="1" i="0">
-                <a:solidFill>
-                  <a:srgbClr val="FFC107"/>
-                </a:solidFill>
-                <a:latin typeface="Arial"/>
-              </a:rPr>
-              <a:t>КЛЮЧЕВАЯ РОЛЬ</a:t>
-            </a:r>
-          </a:p>
-        </p:txBody>
-      </p:sp>
-      <p:sp>
-        <p:nvSpPr>
-          <p:cNvPr id="4" name="TextBox 3"/>
-          <p:cNvSpPr txBox="1"/>
-          <p:nvPr/>
-        </p:nvSpPr>
-        <p:spPr>
-          <a:xfrm>
-            <a:off x="777240" y="1188720"/>
-            <a:ext cx="10058400" cy="914400"/>
-          </a:xfrm>
-          <a:prstGeom prst="rect">
-            <a:avLst/>
-          </a:prstGeom>
-          <a:noFill/>
-        </p:spPr>
-        <p:txBody>
-          <a:bodyPr wrap="square" anchor="t">
-            <a:spAutoFit/>
-          </a:bodyPr>
-          <a:lstStyle/>
-          <a:p>
-            <a:r>
-              <a:rPr sz="4200" b="1" i="0">
-                <a:solidFill>
-                  <a:srgbClr val="EAF0FA"/>
-                </a:solidFill>
-                <a:latin typeface="Arial"/>
-              </a:rPr>
-              <a:t>Нужен </a:t>
-            </a:r>
-            <a:r>
-              <a:rPr sz="4200" b="1" i="0">
-                <a:solidFill>
-                  <a:srgbClr val="FFC107"/>
-                </a:solidFill>
-                <a:latin typeface="Arial"/>
-              </a:rPr>
-              <a:t>тренер</a:t>
-            </a:r>
-          </a:p>
-        </p:txBody>
-      </p:sp>
-      <p:sp>
-        <p:nvSpPr>
-          <p:cNvPr id="5" name="TextBox 4"/>
-          <p:cNvSpPr txBox="1"/>
-          <p:nvPr/>
-        </p:nvSpPr>
-        <p:spPr>
-          <a:xfrm>
-            <a:off x="777240" y="2057400"/>
-            <a:ext cx="10515600" cy="731520"/>
-          </a:xfrm>
-          <a:prstGeom prst="rect">
-            <a:avLst/>
-          </a:prstGeom>
-          <a:noFill/>
-        </p:spPr>
-        <p:txBody>
-          <a:bodyPr wrap="square" anchor="t">
-            <a:spAutoFit/>
-          </a:bodyPr>
-          <a:lstStyle/>
-          <a:p>
-            <a:pPr algn="l">
-              <a:spcAft>
-                <a:spcPts val="600"/>
-              </a:spcAft>
-            </a:pPr>
-            <a:r>
-              <a:rPr sz="1700" b="0" i="0">
-                <a:solidFill>
-                  <a:srgbClr val="8B9AB8"/>
-                </a:solidFill>
-                <a:latin typeface="Arial"/>
-              </a:rPr>
-              <a:t>Без наставника спорт превращается в риск. Профессиональный тренер — основа безопасного и результативного парка.</a:t>
-            </a:r>
-          </a:p>
-        </p:txBody>
-      </p:sp>
-      <p:sp>
-        <p:nvSpPr>
-          <p:cNvPr id="6" name="Rounded Rectangle 5"/>
-          <p:cNvSpPr/>
-          <p:nvPr/>
-        </p:nvSpPr>
-        <p:spPr>
-          <a:xfrm>
-            <a:off x="777240" y="3108960"/>
-            <a:ext cx="5175504" cy="1600200"/>
-          </a:xfrm>
-          <a:prstGeom prst="roundRect">
-            <a:avLst>
-              <a:gd name="adj" fmla="val 6000"/>
-            </a:avLst>
-          </a:prstGeom>
           <a:solidFill>
-            <a:srgbClr val="141D33"/>
+            <a:srgbClr val="FF5722"/>
           </a:solidFill>
-          <a:ln w="12700">
-            <a:solidFill>
-              <a:srgbClr val="243150"/>
-            </a:solidFill>
+          <a:ln>
+            <a:noFill/>
           </a:ln>
           <a:effectLst/>
         </p:spPr>
@@ -5660,48 +6007,190 @@
           </a:fontRef>
         </p:style>
         <p:txBody>
-          <a:bodyPr rtlCol="0" anchor="ctr" wrap="square" lIns="201168" rIns="201168" tIns="182880" bIns="182880"/>
+          <a:bodyPr rtlCol="0" anchor="ctr"/>
+          <a:lstStyle/>
+          <a:p>
+            <a:pPr algn="ctr"/>
+          </a:p>
+        </p:txBody>
+      </p:sp>
+      <p:sp>
+        <p:nvSpPr>
+          <p:cNvPr id="4" name="TextBox 3"/>
+          <p:cNvSpPr txBox="1"/>
+          <p:nvPr/>
+        </p:nvSpPr>
+        <p:spPr>
+          <a:xfrm>
+            <a:off x="1188720" y="566928"/>
+            <a:ext cx="7315200" cy="411480"/>
+          </a:xfrm>
+          <a:prstGeom prst="rect">
+            <a:avLst/>
+          </a:prstGeom>
+          <a:noFill/>
+        </p:spPr>
+        <p:txBody>
+          <a:bodyPr wrap="square" anchor="t">
+            <a:spAutoFit/>
+          </a:bodyPr>
           <a:lstStyle/>
           <a:p>
             <a:pPr algn="l">
+              <a:spcBef>
+                <a:spcPts val="0"/>
+              </a:spcBef>
               <a:spcAft>
-                <a:spcPts val="400"/>
+                <a:spcPts val="600"/>
               </a:spcAft>
             </a:pPr>
             <a:r>
-              <a:rPr sz="3000" b="0" i="0">
+              <a:rPr sz="1400" b="1" i="0">
                 <a:solidFill>
                   <a:srgbClr val="FFC107"/>
                 </a:solidFill>
                 <a:latin typeface="Arial"/>
               </a:rPr>
-              <a:t>▲</a:t>
-            </a:r>
-          </a:p>
+              <a:t>КЛЮЧЕВАЯ РОЛЬ</a:t>
+            </a:r>
+          </a:p>
+        </p:txBody>
+      </p:sp>
+      <p:sp>
+        <p:nvSpPr>
+          <p:cNvPr id="5" name="TextBox 4"/>
+          <p:cNvSpPr txBox="1"/>
+          <p:nvPr/>
+        </p:nvSpPr>
+        <p:spPr>
+          <a:xfrm>
+            <a:off x="777240" y="1188720"/>
+            <a:ext cx="5486400" cy="914400"/>
+          </a:xfrm>
+          <a:prstGeom prst="rect">
+            <a:avLst/>
+          </a:prstGeom>
+          <a:noFill/>
+        </p:spPr>
+        <p:txBody>
+          <a:bodyPr wrap="square" anchor="t">
+            <a:spAutoFit/>
+          </a:bodyPr>
+          <a:lstStyle/>
+          <a:p>
+            <a:r>
+              <a:rPr sz="4000" b="1" i="0">
+                <a:solidFill>
+                  <a:srgbClr val="EAF0FA"/>
+                </a:solidFill>
+                <a:latin typeface="Arial"/>
+              </a:rPr>
+              <a:t>Нужен </a:t>
+            </a:r>
+            <a:r>
+              <a:rPr sz="4000" b="1" i="0">
+                <a:solidFill>
+                  <a:srgbClr val="FFC107"/>
+                </a:solidFill>
+                <a:latin typeface="Arial"/>
+              </a:rPr>
+              <a:t>тренер</a:t>
+            </a:r>
+          </a:p>
+        </p:txBody>
+      </p:sp>
+      <p:sp>
+        <p:nvSpPr>
+          <p:cNvPr id="6" name="TextBox 5"/>
+          <p:cNvSpPr txBox="1"/>
+          <p:nvPr/>
+        </p:nvSpPr>
+        <p:spPr>
+          <a:xfrm>
+            <a:off x="822960" y="2057400"/>
+            <a:ext cx="5212080" cy="914400"/>
+          </a:xfrm>
+          <a:prstGeom prst="rect">
+            <a:avLst/>
+          </a:prstGeom>
+          <a:noFill/>
+        </p:spPr>
+        <p:txBody>
+          <a:bodyPr wrap="square" anchor="t">
+            <a:spAutoFit/>
+          </a:bodyPr>
+          <a:lstStyle/>
           <a:p>
             <a:pPr algn="l">
+              <a:spcBef>
+                <a:spcPts val="0"/>
+              </a:spcBef>
               <a:spcAft>
-                <a:spcPts val="500"/>
+                <a:spcPts val="600"/>
               </a:spcAft>
             </a:pPr>
             <a:r>
-              <a:rPr sz="1700" b="1" i="0">
-                <a:solidFill>
-                  <a:srgbClr val="FFFFFF"/>
-                </a:solidFill>
-                <a:latin typeface="Arial"/>
-              </a:rPr>
-              <a:t>Правильная техника</a:t>
-            </a:r>
-          </a:p>
-          <a:p>
-            <a:pPr algn="l">
+              <a:rPr sz="1500" b="0" i="0">
+                <a:solidFill>
+                  <a:srgbClr val="8B9AB8"/>
+                </a:solidFill>
+                <a:latin typeface="Arial"/>
+              </a:rPr>
+              <a:t>Без наставника спорт превращается в риск. Тренер — основа безопасного и результативного парка.</a:t>
+            </a:r>
+          </a:p>
+        </p:txBody>
+      </p:sp>
+      <p:sp>
+        <p:nvSpPr>
+          <p:cNvPr id="7" name="TextBox 6"/>
+          <p:cNvSpPr txBox="1"/>
+          <p:nvPr/>
+        </p:nvSpPr>
+        <p:spPr>
+          <a:xfrm>
+            <a:off x="868680" y="3200400"/>
+            <a:ext cx="5212080" cy="3474720"/>
+          </a:xfrm>
+          <a:prstGeom prst="rect">
+            <a:avLst/>
+          </a:prstGeom>
+          <a:noFill/>
+        </p:spPr>
+        <p:txBody>
+          <a:bodyPr wrap="square" anchor="t">
+            <a:spAutoFit/>
+          </a:bodyPr>
+          <a:lstStyle/>
+          <a:p>
+            <a:pPr>
+              <a:spcBef>
+                <a:spcPts val="0"/>
+              </a:spcBef>
               <a:spcAft>
-                <a:spcPts val="0"/>
+                <a:spcPts val="1100"/>
               </a:spcAft>
             </a:pPr>
             <a:r>
-              <a:rPr sz="1250" b="0" i="0">
+              <a:rPr sz="1300" b="1" i="0">
+                <a:solidFill>
+                  <a:srgbClr val="FF5722"/>
+                </a:solidFill>
+                <a:latin typeface="Arial"/>
+              </a:rPr>
+              <a:t>●  </a:t>
+            </a:r>
+            <a:r>
+              <a:rPr sz="1600" b="1" i="0">
+                <a:solidFill>
+                  <a:srgbClr val="FFFFFF"/>
+                </a:solidFill>
+                <a:latin typeface="Arial"/>
+              </a:rPr>
+              <a:t>Правильная техника.  </a:t>
+            </a:r>
+            <a:r>
+              <a:rPr sz="1500" b="0" i="0">
                 <a:solidFill>
                   <a:srgbClr val="8B9AB8"/>
                 </a:solidFill>
@@ -5710,287 +6199,148 @@
               <a:t>Учит трюкам и падениям так, чтобы избежать травм.</a:t>
             </a:r>
           </a:p>
-        </p:txBody>
-      </p:sp>
-      <p:sp>
-        <p:nvSpPr>
-          <p:cNvPr id="7" name="Rounded Rectangle 6"/>
-          <p:cNvSpPr/>
-          <p:nvPr/>
-        </p:nvSpPr>
-        <p:spPr>
-          <a:xfrm>
-            <a:off x="6135624" y="3108960"/>
-            <a:ext cx="5175504" cy="1600200"/>
-          </a:xfrm>
-          <a:prstGeom prst="roundRect">
-            <a:avLst>
-              <a:gd name="adj" fmla="val 6000"/>
-            </a:avLst>
-          </a:prstGeom>
-          <a:solidFill>
-            <a:srgbClr val="141D33"/>
-          </a:solidFill>
-          <a:ln w="12700">
+          <a:p>
+            <a:pPr>
+              <a:spcBef>
+                <a:spcPts val="0"/>
+              </a:spcBef>
+              <a:spcAft>
+                <a:spcPts val="1100"/>
+              </a:spcAft>
+            </a:pPr>
+            <a:r>
+              <a:rPr sz="1300" b="1" i="0">
+                <a:solidFill>
+                  <a:srgbClr val="FF5722"/>
+                </a:solidFill>
+                <a:latin typeface="Arial"/>
+              </a:rPr>
+              <a:t>●  </a:t>
+            </a:r>
+            <a:r>
+              <a:rPr sz="1600" b="1" i="0">
+                <a:solidFill>
+                  <a:srgbClr val="FFFFFF"/>
+                </a:solidFill>
+                <a:latin typeface="Arial"/>
+              </a:rPr>
+              <a:t>Контроль и порядок.  </a:t>
+            </a:r>
+            <a:r>
+              <a:rPr sz="1500" b="0" i="0">
+                <a:solidFill>
+                  <a:srgbClr val="8B9AB8"/>
+                </a:solidFill>
+                <a:latin typeface="Arial"/>
+              </a:rPr>
+              <a:t>Следит за дисциплиной и экипировкой на площадке.</a:t>
+            </a:r>
+          </a:p>
+          <a:p>
+            <a:pPr>
+              <a:spcBef>
+                <a:spcPts val="0"/>
+              </a:spcBef>
+              <a:spcAft>
+                <a:spcPts val="1100"/>
+              </a:spcAft>
+            </a:pPr>
+            <a:r>
+              <a:rPr sz="1300" b="1" i="0">
+                <a:solidFill>
+                  <a:srgbClr val="FF5722"/>
+                </a:solidFill>
+                <a:latin typeface="Arial"/>
+              </a:rPr>
+              <a:t>●  </a:t>
+            </a:r>
+            <a:r>
+              <a:rPr sz="1600" b="1" i="0">
+                <a:solidFill>
+                  <a:srgbClr val="FFFFFF"/>
+                </a:solidFill>
+                <a:latin typeface="Arial"/>
+              </a:rPr>
+              <a:t>Спортивные секции.  </a:t>
+            </a:r>
+            <a:r>
+              <a:rPr sz="1500" b="0" i="0">
+                <a:solidFill>
+                  <a:srgbClr val="8B9AB8"/>
+                </a:solidFill>
+                <a:latin typeface="Arial"/>
+              </a:rPr>
+              <a:t>Группы, прогресс, соревнования и мотивация.</a:t>
+            </a:r>
+          </a:p>
+          <a:p>
+            <a:pPr>
+              <a:spcBef>
+                <a:spcPts val="0"/>
+              </a:spcBef>
+              <a:spcAft>
+                <a:spcPts val="1100"/>
+              </a:spcAft>
+            </a:pPr>
+            <a:r>
+              <a:rPr sz="1300" b="1" i="0">
+                <a:solidFill>
+                  <a:srgbClr val="FF5722"/>
+                </a:solidFill>
+                <a:latin typeface="Arial"/>
+              </a:rPr>
+              <a:t>●  </a:t>
+            </a:r>
+            <a:r>
+              <a:rPr sz="1600" b="1" i="0">
+                <a:solidFill>
+                  <a:srgbClr val="FFFFFF"/>
+                </a:solidFill>
+                <a:latin typeface="Arial"/>
+              </a:rPr>
+              <a:t>Наставничество.  </a:t>
+            </a:r>
+            <a:r>
+              <a:rPr sz="1500" b="0" i="0">
+                <a:solidFill>
+                  <a:srgbClr val="8B9AB8"/>
+                </a:solidFill>
+                <a:latin typeface="Arial"/>
+              </a:rPr>
+              <a:t>Авторитетный взрослый, который направляет ребят.</a:t>
+            </a:r>
+          </a:p>
+        </p:txBody>
+      </p:sp>
+      <p:pic>
+        <p:nvPicPr>
+          <p:cNvPr id="8" name="Picture 7" descr="coach.png"/>
+          <p:cNvPicPr>
+            <a:picLocks noChangeAspect="1"/>
+          </p:cNvPicPr>
+          <p:nvPr/>
+        </p:nvPicPr>
+        <p:blipFill>
+          <a:blip r:embed="rId2"/>
+          <a:stretch>
+            <a:fillRect/>
+          </a:stretch>
+        </p:blipFill>
+        <p:spPr>
+          <a:xfrm>
+            <a:off x="6355080" y="1874519"/>
+            <a:ext cx="5212080" cy="3350622"/>
+          </a:xfrm>
+          <a:prstGeom prst="rect">
+            <a:avLst/>
+          </a:prstGeom>
+          <a:ln w="15875">
             <a:solidFill>
               <a:srgbClr val="243150"/>
             </a:solidFill>
           </a:ln>
-          <a:effectLst/>
-        </p:spPr>
-        <p:style>
-          <a:lnRef idx="1">
-            <a:schemeClr val="accent1"/>
-          </a:lnRef>
-          <a:fillRef idx="3">
-            <a:schemeClr val="accent1"/>
-          </a:fillRef>
-          <a:effectRef idx="2">
-            <a:schemeClr val="accent1"/>
-          </a:effectRef>
-          <a:fontRef idx="minor">
-            <a:schemeClr val="lt1"/>
-          </a:fontRef>
-        </p:style>
-        <p:txBody>
-          <a:bodyPr rtlCol="0" anchor="ctr" wrap="square" lIns="201168" rIns="201168" tIns="182880" bIns="182880"/>
-          <a:lstStyle/>
-          <a:p>
-            <a:pPr algn="l">
-              <a:spcAft>
-                <a:spcPts val="400"/>
-              </a:spcAft>
-            </a:pPr>
-            <a:r>
-              <a:rPr sz="3000" b="0" i="0">
-                <a:solidFill>
-                  <a:srgbClr val="FFC107"/>
-                </a:solidFill>
-                <a:latin typeface="Arial"/>
-              </a:rPr>
-              <a:t>◉</a:t>
-            </a:r>
-          </a:p>
-          <a:p>
-            <a:pPr algn="l">
-              <a:spcAft>
-                <a:spcPts val="500"/>
-              </a:spcAft>
-            </a:pPr>
-            <a:r>
-              <a:rPr sz="1700" b="1" i="0">
-                <a:solidFill>
-                  <a:srgbClr val="FFFFFF"/>
-                </a:solidFill>
-                <a:latin typeface="Arial"/>
-              </a:rPr>
-              <a:t>Контроль и порядок</a:t>
-            </a:r>
-          </a:p>
-          <a:p>
-            <a:pPr algn="l">
-              <a:spcAft>
-                <a:spcPts val="0"/>
-              </a:spcAft>
-            </a:pPr>
-            <a:r>
-              <a:rPr sz="1250" b="0" i="0">
-                <a:solidFill>
-                  <a:srgbClr val="8B9AB8"/>
-                </a:solidFill>
-                <a:latin typeface="Arial"/>
-              </a:rPr>
-              <a:t>Следит за дисциплиной, экипировкой и безопасностью на площадке.</a:t>
-            </a:r>
-          </a:p>
-        </p:txBody>
-      </p:sp>
-      <p:sp>
-        <p:nvSpPr>
-          <p:cNvPr id="8" name="Rounded Rectangle 7"/>
-          <p:cNvSpPr/>
-          <p:nvPr/>
-        </p:nvSpPr>
-        <p:spPr>
-          <a:xfrm>
-            <a:off x="777240" y="4892040"/>
-            <a:ext cx="5175504" cy="1600200"/>
-          </a:xfrm>
-          <a:prstGeom prst="roundRect">
-            <a:avLst>
-              <a:gd name="adj" fmla="val 6000"/>
-            </a:avLst>
-          </a:prstGeom>
-          <a:solidFill>
-            <a:srgbClr val="141D33"/>
-          </a:solidFill>
-          <a:ln w="12700">
-            <a:solidFill>
-              <a:srgbClr val="243150"/>
-            </a:solidFill>
-          </a:ln>
-          <a:effectLst/>
-        </p:spPr>
-        <p:style>
-          <a:lnRef idx="1">
-            <a:schemeClr val="accent1"/>
-          </a:lnRef>
-          <a:fillRef idx="3">
-            <a:schemeClr val="accent1"/>
-          </a:fillRef>
-          <a:effectRef idx="2">
-            <a:schemeClr val="accent1"/>
-          </a:effectRef>
-          <a:fontRef idx="minor">
-            <a:schemeClr val="lt1"/>
-          </a:fontRef>
-        </p:style>
-        <p:txBody>
-          <a:bodyPr rtlCol="0" anchor="ctr" wrap="square" lIns="201168" rIns="201168" tIns="182880" bIns="182880"/>
-          <a:lstStyle/>
-          <a:p>
-            <a:pPr algn="l">
-              <a:spcAft>
-                <a:spcPts val="400"/>
-              </a:spcAft>
-            </a:pPr>
-            <a:r>
-              <a:rPr sz="3000" b="0" i="0">
-                <a:solidFill>
-                  <a:srgbClr val="FFC107"/>
-                </a:solidFill>
-                <a:latin typeface="Arial"/>
-              </a:rPr>
-              <a:t>★</a:t>
-            </a:r>
-          </a:p>
-          <a:p>
-            <a:pPr algn="l">
-              <a:spcAft>
-                <a:spcPts val="500"/>
-              </a:spcAft>
-            </a:pPr>
-            <a:r>
-              <a:rPr sz="1700" b="1" i="0">
-                <a:solidFill>
-                  <a:srgbClr val="FFFFFF"/>
-                </a:solidFill>
-                <a:latin typeface="Arial"/>
-              </a:rPr>
-              <a:t>Спортивные секции</a:t>
-            </a:r>
-          </a:p>
-          <a:p>
-            <a:pPr algn="l">
-              <a:spcAft>
-                <a:spcPts val="0"/>
-              </a:spcAft>
-            </a:pPr>
-            <a:r>
-              <a:rPr sz="1250" b="0" i="0">
-                <a:solidFill>
-                  <a:srgbClr val="8B9AB8"/>
-                </a:solidFill>
-                <a:latin typeface="Arial"/>
-              </a:rPr>
-              <a:t>Группы, прогресс, соревнования и мотивация для детей.</a:t>
-            </a:r>
-          </a:p>
-        </p:txBody>
-      </p:sp>
-      <p:sp>
-        <p:nvSpPr>
-          <p:cNvPr id="9" name="Rounded Rectangle 8"/>
-          <p:cNvSpPr/>
-          <p:nvPr/>
-        </p:nvSpPr>
-        <p:spPr>
-          <a:xfrm>
-            <a:off x="6135624" y="4892040"/>
-            <a:ext cx="5175504" cy="1600200"/>
-          </a:xfrm>
-          <a:prstGeom prst="roundRect">
-            <a:avLst>
-              <a:gd name="adj" fmla="val 6000"/>
-            </a:avLst>
-          </a:prstGeom>
-          <a:solidFill>
-            <a:srgbClr val="141D33"/>
-          </a:solidFill>
-          <a:ln w="12700">
-            <a:solidFill>
-              <a:srgbClr val="243150"/>
-            </a:solidFill>
-          </a:ln>
-          <a:effectLst/>
-        </p:spPr>
-        <p:style>
-          <a:lnRef idx="1">
-            <a:schemeClr val="accent1"/>
-          </a:lnRef>
-          <a:fillRef idx="3">
-            <a:schemeClr val="accent1"/>
-          </a:fillRef>
-          <a:effectRef idx="2">
-            <a:schemeClr val="accent1"/>
-          </a:effectRef>
-          <a:fontRef idx="minor">
-            <a:schemeClr val="lt1"/>
-          </a:fontRef>
-        </p:style>
-        <p:txBody>
-          <a:bodyPr rtlCol="0" anchor="ctr" wrap="square" lIns="201168" rIns="201168" tIns="182880" bIns="182880"/>
-          <a:lstStyle/>
-          <a:p>
-            <a:pPr algn="l">
-              <a:spcAft>
-                <a:spcPts val="400"/>
-              </a:spcAft>
-            </a:pPr>
-            <a:r>
-              <a:rPr sz="3000" b="0" i="0">
-                <a:solidFill>
-                  <a:srgbClr val="FFC107"/>
-                </a:solidFill>
-                <a:latin typeface="Arial"/>
-              </a:rPr>
-              <a:t>♥</a:t>
-            </a:r>
-          </a:p>
-          <a:p>
-            <a:pPr algn="l">
-              <a:spcAft>
-                <a:spcPts val="500"/>
-              </a:spcAft>
-            </a:pPr>
-            <a:r>
-              <a:rPr sz="1700" b="1" i="0">
-                <a:solidFill>
-                  <a:srgbClr val="FFFFFF"/>
-                </a:solidFill>
-                <a:latin typeface="Arial"/>
-              </a:rPr>
-              <a:t>Наставничество</a:t>
-            </a:r>
-          </a:p>
-          <a:p>
-            <a:pPr algn="l">
-              <a:spcAft>
-                <a:spcPts val="0"/>
-              </a:spcAft>
-            </a:pPr>
-            <a:r>
-              <a:rPr sz="1250" b="0" i="0">
-                <a:solidFill>
-                  <a:srgbClr val="8B9AB8"/>
-                </a:solidFill>
-                <a:latin typeface="Arial"/>
-              </a:rPr>
-              <a:t>Авторитетный взрослый, который направляет подростков.</a:t>
-            </a:r>
-          </a:p>
-        </p:txBody>
-      </p:sp>
+        </p:spPr>
+      </p:pic>
     </p:spTree>
   </p:cSld>
   <p:clrMapOvr>
@@ -6055,14 +6405,58 @@
       </p:sp>
       <p:sp>
         <p:nvSpPr>
-          <p:cNvPr id="3" name="TextBox 2"/>
+          <p:cNvPr id="3" name="Rectangle 2"/>
+          <p:cNvSpPr/>
+          <p:nvPr/>
+        </p:nvSpPr>
+        <p:spPr>
+          <a:xfrm>
+            <a:off x="777240" y="649224"/>
+            <a:ext cx="310896" cy="38100"/>
+          </a:xfrm>
+          <a:prstGeom prst="rect">
+            <a:avLst/>
+          </a:prstGeom>
+          <a:solidFill>
+            <a:srgbClr val="FF5722"/>
+          </a:solidFill>
+          <a:ln>
+            <a:noFill/>
+          </a:ln>
+          <a:effectLst/>
+        </p:spPr>
+        <p:style>
+          <a:lnRef idx="1">
+            <a:schemeClr val="accent1"/>
+          </a:lnRef>
+          <a:fillRef idx="3">
+            <a:schemeClr val="accent1"/>
+          </a:fillRef>
+          <a:effectRef idx="2">
+            <a:schemeClr val="accent1"/>
+          </a:effectRef>
+          <a:fontRef idx="minor">
+            <a:schemeClr val="lt1"/>
+          </a:fontRef>
+        </p:style>
+        <p:txBody>
+          <a:bodyPr rtlCol="0" anchor="ctr"/>
+          <a:lstStyle/>
+          <a:p>
+            <a:pPr algn="ctr"/>
+          </a:p>
+        </p:txBody>
+      </p:sp>
+      <p:sp>
+        <p:nvSpPr>
+          <p:cNvPr id="4" name="TextBox 3"/>
           <p:cNvSpPr txBox="1"/>
           <p:nvPr/>
         </p:nvSpPr>
         <p:spPr>
           <a:xfrm>
-            <a:off x="777240" y="640080"/>
-            <a:ext cx="10058400" cy="457200"/>
+            <a:off x="1188720" y="566928"/>
+            <a:ext cx="7315200" cy="411480"/>
           </a:xfrm>
           <a:prstGeom prst="rect">
             <a:avLst/>
@@ -6076,6 +6470,9 @@
           <a:lstStyle/>
           <a:p>
             <a:pPr algn="l">
+              <a:spcBef>
+                <a:spcPts val="0"/>
+              </a:spcBef>
               <a:spcAft>
                 <a:spcPts val="600"/>
               </a:spcAft>
@@ -6094,14 +6491,14 @@
       </p:sp>
       <p:sp>
         <p:nvSpPr>
-          <p:cNvPr id="4" name="TextBox 3"/>
+          <p:cNvPr id="5" name="TextBox 4"/>
           <p:cNvSpPr txBox="1"/>
           <p:nvPr/>
         </p:nvSpPr>
         <p:spPr>
           <a:xfrm>
             <a:off x="777240" y="1188720"/>
-            <a:ext cx="10607040" cy="1645920"/>
+            <a:ext cx="5577840" cy="1828800"/>
           </a:xfrm>
           <a:prstGeom prst="rect">
             <a:avLst/>
@@ -6115,6 +6512,9 @@
           <a:lstStyle/>
           <a:p>
             <a:pPr algn="l">
+              <a:spcBef>
+                <a:spcPts val="0"/>
+              </a:spcBef>
               <a:spcAft>
                 <a:spcPts val="0"/>
               </a:spcAft>
@@ -6126,21 +6526,40 @@
                 </a:solidFill>
                 <a:latin typeface="Arial"/>
               </a:rPr>
-              <a:t>Польза для города и его молодёжи</a:t>
-            </a:r>
-          </a:p>
-        </p:txBody>
-      </p:sp>
-      <p:sp>
-        <p:nvSpPr>
-          <p:cNvPr id="5" name="Rounded Rectangle 4"/>
+              <a:t>Польза для города</a:t>
+            </a:r>
+          </a:p>
+          <a:p>
+            <a:pPr algn="l">
+              <a:spcBef>
+                <a:spcPts val="0"/>
+              </a:spcBef>
+              <a:spcAft>
+                <a:spcPts val="0"/>
+              </a:spcAft>
+            </a:pPr>
+            <a:r>
+              <a:rPr sz="3600" b="1" i="0">
+                <a:solidFill>
+                  <a:srgbClr val="EAF0FA"/>
+                </a:solidFill>
+                <a:latin typeface="Arial"/>
+              </a:rPr>
+              <a:t>и его молодёжи</a:t>
+            </a:r>
+          </a:p>
+        </p:txBody>
+      </p:sp>
+      <p:sp>
+        <p:nvSpPr>
+          <p:cNvPr id="6" name="Rounded Rectangle 5"/>
           <p:cNvSpPr/>
           <p:nvPr/>
         </p:nvSpPr>
         <p:spPr>
           <a:xfrm>
-            <a:off x="777240" y="2651760"/>
-            <a:ext cx="3506724" cy="566928"/>
+            <a:off x="822960" y="2377440"/>
+            <a:ext cx="3321100" cy="502920"/>
           </a:xfrm>
           <a:prstGeom prst="roundRect">
             <a:avLst/>
@@ -6175,7 +6594,7 @@
           <a:p>
             <a:pPr algn="ctr"/>
             <a:r>
-              <a:rPr sz="1400" b="1" i="0">
+              <a:rPr sz="1250" b="1" i="0">
                 <a:solidFill>
                   <a:srgbClr val="EAF0FA"/>
                 </a:solidFill>
@@ -6188,14 +6607,14 @@
       </p:sp>
       <p:sp>
         <p:nvSpPr>
-          <p:cNvPr id="6" name="Rounded Rectangle 5"/>
+          <p:cNvPr id="7" name="Rounded Rectangle 6"/>
           <p:cNvSpPr/>
           <p:nvPr/>
         </p:nvSpPr>
         <p:spPr>
           <a:xfrm>
-            <a:off x="4485132" y="2651760"/>
-            <a:ext cx="3296412" cy="566928"/>
+            <a:off x="822960" y="2944368"/>
+            <a:ext cx="3123590" cy="502920"/>
           </a:xfrm>
           <a:prstGeom prst="roundRect">
             <a:avLst/>
@@ -6230,7 +6649,7 @@
           <a:p>
             <a:pPr algn="ctr"/>
             <a:r>
-              <a:rPr sz="1400" b="1" i="0">
+              <a:rPr sz="1250" b="1" i="0">
                 <a:solidFill>
                   <a:srgbClr val="EAF0FA"/>
                 </a:solidFill>
@@ -6243,14 +6662,14 @@
       </p:sp>
       <p:sp>
         <p:nvSpPr>
-          <p:cNvPr id="7" name="Rounded Rectangle 6"/>
+          <p:cNvPr id="8" name="Rounded Rectangle 7"/>
           <p:cNvSpPr/>
           <p:nvPr/>
         </p:nvSpPr>
         <p:spPr>
           <a:xfrm>
-            <a:off x="7982712" y="2651760"/>
-            <a:ext cx="3086100" cy="566928"/>
+            <a:off x="822960" y="3511296"/>
+            <a:ext cx="2728569" cy="502920"/>
           </a:xfrm>
           <a:prstGeom prst="roundRect">
             <a:avLst/>
@@ -6285,27 +6704,27 @@
           <a:p>
             <a:pPr algn="ctr"/>
             <a:r>
-              <a:rPr sz="1400" b="1" i="0">
+              <a:rPr sz="1250" b="1" i="0">
                 <a:solidFill>
                   <a:srgbClr val="EAF0FA"/>
                 </a:solidFill>
                 <a:latin typeface="Arial"/>
               </a:rPr>
-              <a:t>Активный и полезный досуг</a:t>
-            </a:r>
-          </a:p>
-        </p:txBody>
-      </p:sp>
-      <p:sp>
-        <p:nvSpPr>
-          <p:cNvPr id="8" name="Rounded Rectangle 7"/>
+              <a:t>Активный полезный досуг</a:t>
+            </a:r>
+          </a:p>
+        </p:txBody>
+      </p:sp>
+      <p:sp>
+        <p:nvSpPr>
+          <p:cNvPr id="9" name="Rounded Rectangle 8"/>
           <p:cNvSpPr/>
           <p:nvPr/>
         </p:nvSpPr>
         <p:spPr>
           <a:xfrm>
-            <a:off x="777240" y="3429000"/>
-            <a:ext cx="3191256" cy="566928"/>
+            <a:off x="822960" y="4078224"/>
+            <a:ext cx="3024835" cy="502920"/>
           </a:xfrm>
           <a:prstGeom prst="roundRect">
             <a:avLst/>
@@ -6340,7 +6759,7 @@
           <a:p>
             <a:pPr algn="ctr"/>
             <a:r>
-              <a:rPr sz="1400" b="1" i="0">
+              <a:rPr sz="1250" b="1" i="0">
                 <a:solidFill>
                   <a:srgbClr val="EAF0FA"/>
                 </a:solidFill>
@@ -6353,14 +6772,14 @@
       </p:sp>
       <p:sp>
         <p:nvSpPr>
-          <p:cNvPr id="9" name="Rounded Rectangle 8"/>
+          <p:cNvPr id="10" name="Rounded Rectangle 9"/>
           <p:cNvSpPr/>
           <p:nvPr/>
         </p:nvSpPr>
         <p:spPr>
           <a:xfrm>
-            <a:off x="4169664" y="3429000"/>
-            <a:ext cx="2875788" cy="566928"/>
+            <a:off x="822960" y="4645152"/>
+            <a:ext cx="2728569" cy="502920"/>
           </a:xfrm>
           <a:prstGeom prst="roundRect">
             <a:avLst/>
@@ -6395,7 +6814,7 @@
           <a:p>
             <a:pPr algn="ctr"/>
             <a:r>
-              <a:rPr sz="1400" b="1" i="0">
+              <a:rPr sz="1250" b="1" i="0">
                 <a:solidFill>
                   <a:srgbClr val="EAF0FA"/>
                 </a:solidFill>
@@ -6408,14 +6827,14 @@
       </p:sp>
       <p:sp>
         <p:nvSpPr>
-          <p:cNvPr id="10" name="Rounded Rectangle 9"/>
+          <p:cNvPr id="11" name="Rounded Rectangle 10"/>
           <p:cNvSpPr/>
           <p:nvPr/>
         </p:nvSpPr>
         <p:spPr>
           <a:xfrm>
-            <a:off x="7246620" y="3429000"/>
-            <a:ext cx="2875788" cy="566928"/>
+            <a:off x="822960" y="5212080"/>
+            <a:ext cx="2728569" cy="502920"/>
           </a:xfrm>
           <a:prstGeom prst="roundRect">
             <a:avLst/>
@@ -6450,7 +6869,7 @@
           <a:p>
             <a:pPr algn="ctr"/>
             <a:r>
-              <a:rPr sz="1400" b="1" i="0">
+              <a:rPr sz="1250" b="1" i="0">
                 <a:solidFill>
                   <a:srgbClr val="EAF0FA"/>
                 </a:solidFill>
@@ -6463,14 +6882,14 @@
       </p:sp>
       <p:sp>
         <p:nvSpPr>
-          <p:cNvPr id="11" name="Rounded Rectangle 10"/>
+          <p:cNvPr id="12" name="Rounded Rectangle 11"/>
           <p:cNvSpPr/>
           <p:nvPr/>
         </p:nvSpPr>
         <p:spPr>
           <a:xfrm>
-            <a:off x="777240" y="4206240"/>
-            <a:ext cx="3296412" cy="566928"/>
+            <a:off x="822960" y="5779008"/>
+            <a:ext cx="3123590" cy="502920"/>
           </a:xfrm>
           <a:prstGeom prst="roundRect">
             <a:avLst/>
@@ -6505,7 +6924,7 @@
           <a:p>
             <a:pPr algn="ctr"/>
             <a:r>
-              <a:rPr sz="1400" b="1" i="0">
+              <a:rPr sz="1250" b="1" i="0">
                 <a:solidFill>
                   <a:srgbClr val="EAF0FA"/>
                 </a:solidFill>
@@ -6516,45 +6935,35 @@
           </a:p>
         </p:txBody>
       </p:sp>
-      <p:sp>
-        <p:nvSpPr>
-          <p:cNvPr id="12" name="TextBox 11"/>
-          <p:cNvSpPr txBox="1"/>
-          <p:nvPr/>
-        </p:nvSpPr>
-        <p:spPr>
-          <a:xfrm>
-            <a:off x="777240" y="5669280"/>
-            <a:ext cx="10607040" cy="822960"/>
+      <p:pic>
+        <p:nvPicPr>
+          <p:cNvPr id="13" name="Picture 12" descr="social.png"/>
+          <p:cNvPicPr>
+            <a:picLocks noChangeAspect="1"/>
+          </p:cNvPicPr>
+          <p:nvPr/>
+        </p:nvPicPr>
+        <p:blipFill>
+          <a:blip r:embed="rId2"/>
+          <a:stretch>
+            <a:fillRect/>
+          </a:stretch>
+        </p:blipFill>
+        <p:spPr>
+          <a:xfrm>
+            <a:off x="6355080" y="1874519"/>
+            <a:ext cx="5212080" cy="3350622"/>
           </a:xfrm>
           <a:prstGeom prst="rect">
             <a:avLst/>
           </a:prstGeom>
-          <a:noFill/>
-        </p:spPr>
-        <p:txBody>
-          <a:bodyPr wrap="square" anchor="t">
-            <a:spAutoFit/>
-          </a:bodyPr>
-          <a:lstStyle/>
-          <a:p>
-            <a:pPr algn="l">
-              <a:spcAft>
-                <a:spcPts val="600"/>
-              </a:spcAft>
-            </a:pPr>
-            <a:r>
-              <a:rPr sz="1900" b="0" i="0">
-                <a:solidFill>
-                  <a:srgbClr val="8B9AB8"/>
-                </a:solidFill>
-                <a:latin typeface="Arial"/>
-              </a:rPr>
-              <a:t>Парк объединяет молодёжь вокруг здорового образа жизни и даёт детям цель.</a:t>
-            </a:r>
-          </a:p>
-        </p:txBody>
-      </p:sp>
+          <a:ln w="15875">
+            <a:solidFill>
+              <a:srgbClr val="243150"/>
+            </a:solidFill>
+          </a:ln>
+        </p:spPr>
+      </p:pic>
     </p:spTree>
   </p:cSld>
   <p:clrMapOvr>
@@ -6619,155 +7028,23 @@
       </p:sp>
       <p:sp>
         <p:nvSpPr>
-          <p:cNvPr id="3" name="TextBox 2"/>
-          <p:cNvSpPr txBox="1"/>
-          <p:nvPr/>
-        </p:nvSpPr>
-        <p:spPr>
-          <a:xfrm>
-            <a:off x="777240" y="640080"/>
-            <a:ext cx="10058400" cy="457200"/>
+          <p:cNvPr id="3" name="Rectangle 2"/>
+          <p:cNvSpPr/>
+          <p:nvPr/>
+        </p:nvSpPr>
+        <p:spPr>
+          <a:xfrm>
+            <a:off x="777240" y="649224"/>
+            <a:ext cx="310896" cy="38100"/>
           </a:xfrm>
           <a:prstGeom prst="rect">
             <a:avLst/>
           </a:prstGeom>
-          <a:noFill/>
-        </p:spPr>
-        <p:txBody>
-          <a:bodyPr wrap="square" anchor="t">
-            <a:spAutoFit/>
-          </a:bodyPr>
-          <a:lstStyle/>
-          <a:p>
-            <a:pPr algn="l">
-              <a:spcAft>
-                <a:spcPts val="600"/>
-              </a:spcAft>
-            </a:pPr>
-            <a:r>
-              <a:rPr sz="1400" b="1" i="0">
-                <a:solidFill>
-                  <a:srgbClr val="FFC107"/>
-                </a:solidFill>
-                <a:latin typeface="Arial"/>
-              </a:rPr>
-              <a:t>ЭКОНОМИКА И БЮДЖЕТ</a:t>
-            </a:r>
-          </a:p>
-        </p:txBody>
-      </p:sp>
-      <p:sp>
-        <p:nvSpPr>
-          <p:cNvPr id="4" name="TextBox 3"/>
-          <p:cNvSpPr txBox="1"/>
-          <p:nvPr/>
-        </p:nvSpPr>
-        <p:spPr>
-          <a:xfrm>
-            <a:off x="777240" y="1188720"/>
-            <a:ext cx="10607040" cy="1645920"/>
-          </a:xfrm>
-          <a:prstGeom prst="rect">
-            <a:avLst/>
-          </a:prstGeom>
-          <a:noFill/>
-        </p:spPr>
-        <p:txBody>
-          <a:bodyPr wrap="square" anchor="t">
-            <a:spAutoFit/>
-          </a:bodyPr>
-          <a:lstStyle/>
-          <a:p>
-            <a:pPr algn="l">
-              <a:spcAft>
-                <a:spcPts val="0"/>
-              </a:spcAft>
-            </a:pPr>
-            <a:r>
-              <a:rPr sz="3400" b="1" i="0">
-                <a:solidFill>
-                  <a:srgbClr val="EAF0FA"/>
-                </a:solidFill>
-                <a:latin typeface="Arial"/>
-              </a:rPr>
-              <a:t>Выгода для местного бизнеса и казны</a:t>
-            </a:r>
-          </a:p>
-        </p:txBody>
-      </p:sp>
-      <p:sp>
-        <p:nvSpPr>
-          <p:cNvPr id="5" name="TextBox 4"/>
-          <p:cNvSpPr txBox="1"/>
-          <p:nvPr/>
-        </p:nvSpPr>
-        <p:spPr>
-          <a:xfrm>
-            <a:off x="777240" y="2194560"/>
-            <a:ext cx="10607040" cy="1097280"/>
-          </a:xfrm>
-          <a:prstGeom prst="rect">
-            <a:avLst/>
-          </a:prstGeom>
-          <a:noFill/>
-        </p:spPr>
-        <p:txBody>
-          <a:bodyPr wrap="square" anchor="t">
-            <a:spAutoFit/>
-          </a:bodyPr>
-          <a:lstStyle/>
-          <a:p>
-            <a:r>
-              <a:rPr sz="1800" b="0" i="0">
-                <a:solidFill>
-                  <a:srgbClr val="EAF0FA"/>
-                </a:solidFill>
-                <a:latin typeface="Arial"/>
-              </a:rPr>
-              <a:t>С появлением парка вырастет спрос на спортивный инвентарь. Это </a:t>
-            </a:r>
-            <a:r>
-              <a:rPr sz="1800" b="1" i="0">
-                <a:solidFill>
-                  <a:srgbClr val="FFC107"/>
-                </a:solidFill>
-                <a:latin typeface="Arial"/>
-              </a:rPr>
-              <a:t>возможность для местных торговцев</a:t>
-            </a:r>
-            <a:r>
-              <a:rPr sz="1800" b="0" i="0">
-                <a:solidFill>
-                  <a:srgbClr val="EAF0FA"/>
-                </a:solidFill>
-                <a:latin typeface="Arial"/>
-              </a:rPr>
-              <a:t> продавать самокаты, скейтборды, BMX, запчасти и защитную экипировку.</a:t>
-            </a:r>
-          </a:p>
-        </p:txBody>
-      </p:sp>
-      <p:sp>
-        <p:nvSpPr>
-          <p:cNvPr id="6" name="Rounded Rectangle 5"/>
-          <p:cNvSpPr/>
-          <p:nvPr/>
-        </p:nvSpPr>
-        <p:spPr>
-          <a:xfrm>
-            <a:off x="777240" y="3657600"/>
-            <a:ext cx="3410712" cy="2377440"/>
-          </a:xfrm>
-          <a:prstGeom prst="roundRect">
-            <a:avLst/>
-          </a:prstGeom>
           <a:solidFill>
-            <a:srgbClr val="141D33"/>
+            <a:srgbClr val="FF5722"/>
           </a:solidFill>
           <a:ln>
-            <a:solidFill>
-              <a:srgbClr val="243150"/>
-            </a:solidFill>
+            <a:noFill/>
           </a:ln>
           <a:effectLst/>
         </p:spPr>
@@ -6786,205 +7063,260 @@
           </a:fontRef>
         </p:style>
         <p:txBody>
-          <a:bodyPr rtlCol="0" anchor="ctr" wrap="square" lIns="228600" tIns="274320"/>
+          <a:bodyPr rtlCol="0" anchor="ctr"/>
+          <a:lstStyle/>
+          <a:p>
+            <a:pPr algn="ctr"/>
+          </a:p>
+        </p:txBody>
+      </p:sp>
+      <p:sp>
+        <p:nvSpPr>
+          <p:cNvPr id="4" name="TextBox 3"/>
+          <p:cNvSpPr txBox="1"/>
+          <p:nvPr/>
+        </p:nvSpPr>
+        <p:spPr>
+          <a:xfrm>
+            <a:off x="1188720" y="566928"/>
+            <a:ext cx="7315200" cy="411480"/>
+          </a:xfrm>
+          <a:prstGeom prst="rect">
+            <a:avLst/>
+          </a:prstGeom>
+          <a:noFill/>
+        </p:spPr>
+        <p:txBody>
+          <a:bodyPr wrap="square" anchor="t">
+            <a:spAutoFit/>
+          </a:bodyPr>
           <a:lstStyle/>
           <a:p>
             <a:pPr algn="l">
-              <a:spcAft>
-                <a:spcPts val="800"/>
-              </a:spcAft>
-            </a:pPr>
-            <a:r>
-              <a:rPr sz="3400" b="1" i="0">
-                <a:solidFill>
-                  <a:srgbClr val="FFC107"/>
-                </a:solidFill>
-                <a:latin typeface="Arial"/>
-              </a:rPr>
-              <a:t>Рост продаж</a:t>
-            </a:r>
-          </a:p>
-          <a:p>
-            <a:pPr algn="l">
+              <a:spcBef>
+                <a:spcPts val="0"/>
+              </a:spcBef>
               <a:spcAft>
                 <a:spcPts val="600"/>
               </a:spcAft>
             </a:pPr>
             <a:r>
+              <a:rPr sz="1400" b="1" i="0">
+                <a:solidFill>
+                  <a:srgbClr val="FFC107"/>
+                </a:solidFill>
+                <a:latin typeface="Arial"/>
+              </a:rPr>
+              <a:t>ЭКОНОМИКА И БЮДЖЕТ</a:t>
+            </a:r>
+          </a:p>
+        </p:txBody>
+      </p:sp>
+      <p:sp>
+        <p:nvSpPr>
+          <p:cNvPr id="5" name="TextBox 4"/>
+          <p:cNvSpPr txBox="1"/>
+          <p:nvPr/>
+        </p:nvSpPr>
+        <p:spPr>
+          <a:xfrm>
+            <a:off x="777240" y="1188720"/>
+            <a:ext cx="5577840" cy="1828800"/>
+          </a:xfrm>
+          <a:prstGeom prst="rect">
+            <a:avLst/>
+          </a:prstGeom>
+          <a:noFill/>
+        </p:spPr>
+        <p:txBody>
+          <a:bodyPr wrap="square" anchor="t">
+            <a:spAutoFit/>
+          </a:bodyPr>
+          <a:lstStyle/>
+          <a:p>
+            <a:pPr algn="l">
+              <a:spcBef>
+                <a:spcPts val="0"/>
+              </a:spcBef>
+              <a:spcAft>
+                <a:spcPts val="0"/>
+              </a:spcAft>
+            </a:pPr>
+            <a:r>
+              <a:rPr sz="3300" b="1" i="0">
+                <a:solidFill>
+                  <a:srgbClr val="EAF0FA"/>
+                </a:solidFill>
+                <a:latin typeface="Arial"/>
+              </a:rPr>
+              <a:t>Выгода для бизнеса и казны</a:t>
+            </a:r>
+          </a:p>
+        </p:txBody>
+      </p:sp>
+      <p:sp>
+        <p:nvSpPr>
+          <p:cNvPr id="6" name="TextBox 5"/>
+          <p:cNvSpPr txBox="1"/>
+          <p:nvPr/>
+        </p:nvSpPr>
+        <p:spPr>
+          <a:xfrm>
+            <a:off x="868680" y="2743200"/>
+            <a:ext cx="5212080" cy="3474720"/>
+          </a:xfrm>
+          <a:prstGeom prst="rect">
+            <a:avLst/>
+          </a:prstGeom>
+          <a:noFill/>
+        </p:spPr>
+        <p:txBody>
+          <a:bodyPr wrap="square" anchor="t">
+            <a:spAutoFit/>
+          </a:bodyPr>
+          <a:lstStyle/>
+          <a:p>
+            <a:pPr>
+              <a:spcBef>
+                <a:spcPts val="0"/>
+              </a:spcBef>
+              <a:spcAft>
+                <a:spcPts val="1100"/>
+              </a:spcAft>
+            </a:pPr>
+            <a:r>
+              <a:rPr sz="1300" b="1" i="0">
+                <a:solidFill>
+                  <a:srgbClr val="FF5722"/>
+                </a:solidFill>
+                <a:latin typeface="Arial"/>
+              </a:rPr>
+              <a:t>●  </a:t>
+            </a:r>
+            <a:r>
+              <a:rPr sz="1600" b="1" i="0">
+                <a:solidFill>
+                  <a:srgbClr val="FFFFFF"/>
+                </a:solidFill>
+                <a:latin typeface="Arial"/>
+              </a:rPr>
+              <a:t>Рост продаж.  </a:t>
+            </a:r>
+            <a:r>
               <a:rPr sz="1500" b="0" i="0">
                 <a:solidFill>
                   <a:srgbClr val="8B9AB8"/>
                 </a:solidFill>
                 <a:latin typeface="Arial"/>
               </a:rPr>
-              <a:t>Больше выручки у местных продавцов инвентаря и экипировки.</a:t>
-            </a:r>
-          </a:p>
-        </p:txBody>
-      </p:sp>
-      <p:sp>
-        <p:nvSpPr>
-          <p:cNvPr id="7" name="Rounded Rectangle 6"/>
-          <p:cNvSpPr/>
-          <p:nvPr/>
-        </p:nvSpPr>
-        <p:spPr>
-          <a:xfrm>
-            <a:off x="4370832" y="3657600"/>
-            <a:ext cx="3410712" cy="2377440"/>
-          </a:xfrm>
-          <a:prstGeom prst="roundRect">
-            <a:avLst/>
-          </a:prstGeom>
-          <a:solidFill>
-            <a:srgbClr val="141D33"/>
-          </a:solidFill>
-          <a:ln>
+              <a:t>Местные торговцы продают самокаты, скейты, BMX, запчасти и защиту.</a:t>
+            </a:r>
+          </a:p>
+          <a:p>
+            <a:pPr>
+              <a:spcBef>
+                <a:spcPts val="0"/>
+              </a:spcBef>
+              <a:spcAft>
+                <a:spcPts val="1100"/>
+              </a:spcAft>
+            </a:pPr>
+            <a:r>
+              <a:rPr sz="1300" b="1" i="0">
+                <a:solidFill>
+                  <a:srgbClr val="FF5722"/>
+                </a:solidFill>
+                <a:latin typeface="Arial"/>
+              </a:rPr>
+              <a:t>●  </a:t>
+            </a:r>
+            <a:r>
+              <a:rPr sz="1600" b="1" i="0">
+                <a:solidFill>
+                  <a:srgbClr val="FFFFFF"/>
+                </a:solidFill>
+                <a:latin typeface="Arial"/>
+              </a:rPr>
+              <a:t>Новые рабочие места.  </a:t>
+            </a:r>
+            <a:r>
+              <a:rPr sz="1500" b="0" i="0">
+                <a:solidFill>
+                  <a:srgbClr val="8B9AB8"/>
+                </a:solidFill>
+                <a:latin typeface="Arial"/>
+              </a:rPr>
+              <a:t>Магазины, прокат, сервис и тренеры.</a:t>
+            </a:r>
+          </a:p>
+          <a:p>
+            <a:pPr>
+              <a:spcBef>
+                <a:spcPts val="0"/>
+              </a:spcBef>
+              <a:spcAft>
+                <a:spcPts val="1100"/>
+              </a:spcAft>
+            </a:pPr>
+            <a:r>
+              <a:rPr sz="1300" b="1" i="0">
+                <a:solidFill>
+                  <a:srgbClr val="FF5722"/>
+                </a:solidFill>
+                <a:latin typeface="Arial"/>
+              </a:rPr>
+              <a:t>●  </a:t>
+            </a:r>
+            <a:r>
+              <a:rPr sz="1600" b="1" i="0">
+                <a:solidFill>
+                  <a:srgbClr val="FFFFFF"/>
+                </a:solidFill>
+                <a:latin typeface="Arial"/>
+              </a:rPr>
+              <a:t>Средства в бюджет.  </a:t>
+            </a:r>
+            <a:r>
+              <a:rPr sz="1500" b="0" i="0">
+                <a:solidFill>
+                  <a:srgbClr val="8B9AB8"/>
+                </a:solidFill>
+                <a:latin typeface="Arial"/>
+              </a:rPr>
+              <a:t>Налоги и сборы с торговли пополняют казну города.</a:t>
+            </a:r>
+          </a:p>
+        </p:txBody>
+      </p:sp>
+      <p:pic>
+        <p:nvPicPr>
+          <p:cNvPr id="7" name="Picture 6" descr="budget.png"/>
+          <p:cNvPicPr>
+            <a:picLocks noChangeAspect="1"/>
+          </p:cNvPicPr>
+          <p:nvPr/>
+        </p:nvPicPr>
+        <p:blipFill>
+          <a:blip r:embed="rId2"/>
+          <a:stretch>
+            <a:fillRect/>
+          </a:stretch>
+        </p:blipFill>
+        <p:spPr>
+          <a:xfrm>
+            <a:off x="6355080" y="1874519"/>
+            <a:ext cx="5212080" cy="3350622"/>
+          </a:xfrm>
+          <a:prstGeom prst="rect">
+            <a:avLst/>
+          </a:prstGeom>
+          <a:ln w="15875">
             <a:solidFill>
               <a:srgbClr val="243150"/>
             </a:solidFill>
           </a:ln>
-          <a:effectLst/>
-        </p:spPr>
-        <p:style>
-          <a:lnRef idx="1">
-            <a:schemeClr val="accent1"/>
-          </a:lnRef>
-          <a:fillRef idx="3">
-            <a:schemeClr val="accent1"/>
-          </a:fillRef>
-          <a:effectRef idx="2">
-            <a:schemeClr val="accent1"/>
-          </a:effectRef>
-          <a:fontRef idx="minor">
-            <a:schemeClr val="lt1"/>
-          </a:fontRef>
-        </p:style>
-        <p:txBody>
-          <a:bodyPr rtlCol="0" anchor="ctr" wrap="square" lIns="228600" tIns="274320"/>
-          <a:lstStyle/>
-          <a:p>
-            <a:pPr algn="l">
-              <a:spcAft>
-                <a:spcPts val="800"/>
-              </a:spcAft>
-            </a:pPr>
-            <a:r>
-              <a:rPr sz="3400" b="1" i="0">
-                <a:solidFill>
-                  <a:srgbClr val="FFC107"/>
-                </a:solidFill>
-                <a:latin typeface="Arial"/>
-              </a:rPr>
-              <a:t>Рабочие места</a:t>
-            </a:r>
-          </a:p>
-          <a:p>
-            <a:pPr algn="l">
-              <a:spcAft>
-                <a:spcPts val="600"/>
-              </a:spcAft>
-            </a:pPr>
-            <a:r>
-              <a:rPr sz="1500" b="0" i="0">
-                <a:solidFill>
-                  <a:srgbClr val="8B9AB8"/>
-                </a:solidFill>
-                <a:latin typeface="Arial"/>
-              </a:rPr>
-              <a:t>Магазины, прокат, сервис, тренеры — новая занятость в городе.</a:t>
-            </a:r>
-          </a:p>
-        </p:txBody>
-      </p:sp>
-      <p:sp>
-        <p:nvSpPr>
-          <p:cNvPr id="8" name="Rounded Rectangle 7"/>
-          <p:cNvSpPr/>
-          <p:nvPr/>
-        </p:nvSpPr>
-        <p:spPr>
-          <a:xfrm>
-            <a:off x="7964424" y="3657600"/>
-            <a:ext cx="3410712" cy="2377440"/>
-          </a:xfrm>
-          <a:prstGeom prst="roundRect">
-            <a:avLst/>
-          </a:prstGeom>
-          <a:solidFill>
-            <a:srgbClr val="141D33"/>
-          </a:solidFill>
-          <a:ln w="19050">
-            <a:solidFill>
-              <a:srgbClr val="FFC107"/>
-            </a:solidFill>
-          </a:ln>
-          <a:effectLst/>
-        </p:spPr>
-        <p:style>
-          <a:lnRef idx="1">
-            <a:schemeClr val="accent1"/>
-          </a:lnRef>
-          <a:fillRef idx="3">
-            <a:schemeClr val="accent1"/>
-          </a:fillRef>
-          <a:effectRef idx="2">
-            <a:schemeClr val="accent1"/>
-          </a:effectRef>
-          <a:fontRef idx="minor">
-            <a:schemeClr val="lt1"/>
-          </a:fontRef>
-        </p:style>
-        <p:txBody>
-          <a:bodyPr rtlCol="0" anchor="ctr" wrap="square" lIns="228600" tIns="274320"/>
-          <a:lstStyle/>
-          <a:p>
-            <a:pPr algn="l">
-              <a:spcAft>
-                <a:spcPts val="800"/>
-              </a:spcAft>
-            </a:pPr>
-            <a:r>
-              <a:rPr sz="3400" b="1" i="0">
-                <a:solidFill>
-                  <a:srgbClr val="FFC107"/>
-                </a:solidFill>
-                <a:latin typeface="Arial"/>
-              </a:rPr>
-              <a:t>В бюджет</a:t>
-            </a:r>
-          </a:p>
-          <a:p>
-            <a:r>
-              <a:rPr sz="1500" b="0" i="0">
-                <a:solidFill>
-                  <a:srgbClr val="8B9AB8"/>
-                </a:solidFill>
-                <a:latin typeface="Arial"/>
-              </a:rPr>
-              <a:t>Налоги и сборы с торговли — </a:t>
-            </a:r>
-            <a:r>
-              <a:rPr sz="1500" b="1" i="0">
-                <a:solidFill>
-                  <a:srgbClr val="FFFFFF"/>
-                </a:solidFill>
-                <a:latin typeface="Arial"/>
-              </a:rPr>
-              <a:t>средства в казну города</a:t>
-            </a:r>
-            <a:r>
-              <a:rPr sz="1500" b="0" i="0">
-                <a:solidFill>
-                  <a:srgbClr val="8B9AB8"/>
-                </a:solidFill>
-                <a:latin typeface="Arial"/>
-              </a:rPr>
-              <a:t>.</a:t>
-            </a:r>
-          </a:p>
-        </p:txBody>
-      </p:sp>
+        </p:spPr>
+      </p:pic>
     </p:spTree>
   </p:cSld>
   <p:clrMapOvr>
@@ -7049,105 +7381,23 @@
       </p:sp>
       <p:sp>
         <p:nvSpPr>
-          <p:cNvPr id="3" name="TextBox 2"/>
-          <p:cNvSpPr txBox="1"/>
-          <p:nvPr/>
-        </p:nvSpPr>
-        <p:spPr>
-          <a:xfrm>
-            <a:off x="777240" y="640080"/>
-            <a:ext cx="10058400" cy="457200"/>
+          <p:cNvPr id="3" name="Rectangle 2"/>
+          <p:cNvSpPr/>
+          <p:nvPr/>
+        </p:nvSpPr>
+        <p:spPr>
+          <a:xfrm>
+            <a:off x="777240" y="649224"/>
+            <a:ext cx="310896" cy="38100"/>
           </a:xfrm>
           <a:prstGeom prst="rect">
             <a:avLst/>
           </a:prstGeom>
-          <a:noFill/>
-        </p:spPr>
-        <p:txBody>
-          <a:bodyPr wrap="square" anchor="t">
-            <a:spAutoFit/>
-          </a:bodyPr>
-          <a:lstStyle/>
-          <a:p>
-            <a:pPr algn="l">
-              <a:spcAft>
-                <a:spcPts val="600"/>
-              </a:spcAft>
-            </a:pPr>
-            <a:r>
-              <a:rPr sz="1400" b="1" i="0">
-                <a:solidFill>
-                  <a:srgbClr val="FFC107"/>
-                </a:solidFill>
-                <a:latin typeface="Arial"/>
-              </a:rPr>
-              <a:t>ИТОГ</a:t>
-            </a:r>
-          </a:p>
-        </p:txBody>
-      </p:sp>
-      <p:sp>
-        <p:nvSpPr>
-          <p:cNvPr id="4" name="TextBox 3"/>
-          <p:cNvSpPr txBox="1"/>
-          <p:nvPr/>
-        </p:nvSpPr>
-        <p:spPr>
-          <a:xfrm>
-            <a:off x="777240" y="1188720"/>
-            <a:ext cx="10607040" cy="1645920"/>
-          </a:xfrm>
-          <a:prstGeom prst="rect">
-            <a:avLst/>
-          </a:prstGeom>
-          <a:noFill/>
-        </p:spPr>
-        <p:txBody>
-          <a:bodyPr wrap="square" anchor="t">
-            <a:spAutoFit/>
-          </a:bodyPr>
-          <a:lstStyle/>
-          <a:p>
-            <a:pPr algn="l">
-              <a:spcAft>
-                <a:spcPts val="0"/>
-              </a:spcAft>
-            </a:pPr>
-            <a:r>
-              <a:rPr sz="3600" b="1" i="0">
-                <a:solidFill>
-                  <a:srgbClr val="EAF0FA"/>
-                </a:solidFill>
-                <a:latin typeface="Arial"/>
-              </a:rPr>
-              <a:t>Все плюсы проекта в одном месте</a:t>
-            </a:r>
-          </a:p>
-        </p:txBody>
-      </p:sp>
-      <p:sp>
-        <p:nvSpPr>
-          <p:cNvPr id="5" name="Rounded Rectangle 4"/>
-          <p:cNvSpPr/>
-          <p:nvPr/>
-        </p:nvSpPr>
-        <p:spPr>
-          <a:xfrm>
-            <a:off x="777240" y="2743200"/>
-            <a:ext cx="5175504" cy="1645920"/>
-          </a:xfrm>
-          <a:prstGeom prst="roundRect">
-            <a:avLst>
-              <a:gd name="adj" fmla="val 6000"/>
-            </a:avLst>
-          </a:prstGeom>
           <a:solidFill>
-            <a:srgbClr val="141D33"/>
+            <a:srgbClr val="FF5722"/>
           </a:solidFill>
-          <a:ln w="12700">
-            <a:solidFill>
-              <a:srgbClr val="243150"/>
-            </a:solidFill>
+          <a:ln>
+            <a:noFill/>
           </a:ln>
           <a:effectLst/>
         </p:spPr>
@@ -7166,48 +7416,147 @@
           </a:fontRef>
         </p:style>
         <p:txBody>
-          <a:bodyPr rtlCol="0" anchor="ctr" wrap="square" lIns="201168" rIns="201168" tIns="182880" bIns="182880"/>
+          <a:bodyPr rtlCol="0" anchor="ctr"/>
+          <a:lstStyle/>
+          <a:p>
+            <a:pPr algn="ctr"/>
+          </a:p>
+        </p:txBody>
+      </p:sp>
+      <p:sp>
+        <p:nvSpPr>
+          <p:cNvPr id="4" name="TextBox 3"/>
+          <p:cNvSpPr txBox="1"/>
+          <p:nvPr/>
+        </p:nvSpPr>
+        <p:spPr>
+          <a:xfrm>
+            <a:off x="1188720" y="566928"/>
+            <a:ext cx="7315200" cy="411480"/>
+          </a:xfrm>
+          <a:prstGeom prst="rect">
+            <a:avLst/>
+          </a:prstGeom>
+          <a:noFill/>
+        </p:spPr>
+        <p:txBody>
+          <a:bodyPr wrap="square" anchor="t">
+            <a:spAutoFit/>
+          </a:bodyPr>
           <a:lstStyle/>
           <a:p>
             <a:pPr algn="l">
+              <a:spcBef>
+                <a:spcPts val="0"/>
+              </a:spcBef>
               <a:spcAft>
-                <a:spcPts val="400"/>
+                <a:spcPts val="600"/>
               </a:spcAft>
             </a:pPr>
             <a:r>
-              <a:rPr sz="3000" b="0" i="0">
+              <a:rPr sz="1400" b="1" i="0">
                 <a:solidFill>
                   <a:srgbClr val="FFC107"/>
                 </a:solidFill>
                 <a:latin typeface="Arial"/>
               </a:rPr>
-              <a:t>▱</a:t>
-            </a:r>
-          </a:p>
+              <a:t>ИТОГ</a:t>
+            </a:r>
+          </a:p>
+        </p:txBody>
+      </p:sp>
+      <p:sp>
+        <p:nvSpPr>
+          <p:cNvPr id="5" name="TextBox 4"/>
+          <p:cNvSpPr txBox="1"/>
+          <p:nvPr/>
+        </p:nvSpPr>
+        <p:spPr>
+          <a:xfrm>
+            <a:off x="777240" y="1280160"/>
+            <a:ext cx="5577840" cy="1828800"/>
+          </a:xfrm>
+          <a:prstGeom prst="rect">
+            <a:avLst/>
+          </a:prstGeom>
+          <a:noFill/>
+        </p:spPr>
+        <p:txBody>
+          <a:bodyPr wrap="square" anchor="t">
+            <a:spAutoFit/>
+          </a:bodyPr>
+          <a:lstStyle/>
           <a:p>
             <a:pPr algn="l">
-              <a:spcAft>
-                <a:spcPts val="500"/>
-              </a:spcAft>
-            </a:pPr>
-            <a:r>
-              <a:rPr sz="1700" b="1" i="0">
-                <a:solidFill>
-                  <a:srgbClr val="FFFFFF"/>
-                </a:solidFill>
-                <a:latin typeface="Arial"/>
-              </a:rPr>
-              <a:t>Спорт и развитие</a:t>
-            </a:r>
-          </a:p>
-          <a:p>
-            <a:pPr algn="l">
+              <a:spcBef>
+                <a:spcPts val="0"/>
+              </a:spcBef>
               <a:spcAft>
                 <a:spcPts val="0"/>
               </a:spcAft>
             </a:pPr>
             <a:r>
-              <a:rPr sz="1250" b="0" i="0">
+              <a:rPr sz="3600" b="1" i="0">
+                <a:solidFill>
+                  <a:srgbClr val="EAF0FA"/>
+                </a:solidFill>
+                <a:latin typeface="Arial"/>
+              </a:rPr>
+              <a:t>Все плюсы проекта</a:t>
+            </a:r>
+          </a:p>
+        </p:txBody>
+      </p:sp>
+      <p:sp>
+        <p:nvSpPr>
+          <p:cNvPr id="6" name="TextBox 5"/>
+          <p:cNvSpPr txBox="1"/>
+          <p:nvPr/>
+        </p:nvSpPr>
+        <p:spPr>
+          <a:xfrm>
+            <a:off x="868680" y="2468880"/>
+            <a:ext cx="5212080" cy="3474720"/>
+          </a:xfrm>
+          <a:prstGeom prst="rect">
+            <a:avLst/>
+          </a:prstGeom>
+          <a:noFill/>
+        </p:spPr>
+        <p:txBody>
+          <a:bodyPr wrap="square" anchor="t">
+            <a:spAutoFit/>
+          </a:bodyPr>
+          <a:lstStyle/>
+          <a:p>
+            <a:pPr>
+              <a:spcBef>
+                <a:spcPts val="0"/>
+              </a:spcBef>
+              <a:spcAft>
+                <a:spcPts val="1100"/>
+              </a:spcAft>
+            </a:pPr>
+            <a:r>
+              <a:rPr sz="1300" b="1" i="0">
+                <a:solidFill>
+                  <a:srgbClr val="FF5722"/>
+                </a:solidFill>
+                <a:latin typeface="Arial"/>
+              </a:rPr>
+              <a:t>●  </a:t>
+            </a:r>
+            <a:r>
+              <a:rPr sz="1600" b="1" i="0">
+                <a:solidFill>
+                  <a:srgbClr val="FFFFFF"/>
+                </a:solidFill>
+                <a:latin typeface="Arial"/>
+              </a:rPr>
+              <a:t>Спорт и развитие.  </a:t>
+            </a:r>
+            <a:r>
+              <a:rPr sz="1500" b="0" i="0">
                 <a:solidFill>
                   <a:srgbClr val="8B9AB8"/>
                 </a:solidFill>
@@ -7216,287 +7565,148 @@
               <a:t>BMX, самокат, скейтборд — новые навыки для детей.</a:t>
             </a:r>
           </a:p>
-        </p:txBody>
-      </p:sp>
-      <p:sp>
-        <p:nvSpPr>
-          <p:cNvPr id="6" name="Rounded Rectangle 5"/>
-          <p:cNvSpPr/>
-          <p:nvPr/>
-        </p:nvSpPr>
-        <p:spPr>
-          <a:xfrm>
-            <a:off x="6135624" y="2743200"/>
-            <a:ext cx="5175504" cy="1645920"/>
-          </a:xfrm>
-          <a:prstGeom prst="roundRect">
-            <a:avLst>
-              <a:gd name="adj" fmla="val 6000"/>
-            </a:avLst>
-          </a:prstGeom>
-          <a:solidFill>
-            <a:srgbClr val="141D33"/>
-          </a:solidFill>
-          <a:ln w="12700">
+          <a:p>
+            <a:pPr>
+              <a:spcBef>
+                <a:spcPts val="0"/>
+              </a:spcBef>
+              <a:spcAft>
+                <a:spcPts val="1100"/>
+              </a:spcAft>
+            </a:pPr>
+            <a:r>
+              <a:rPr sz="1300" b="1" i="0">
+                <a:solidFill>
+                  <a:srgbClr val="FF5722"/>
+                </a:solidFill>
+                <a:latin typeface="Arial"/>
+              </a:rPr>
+              <a:t>●  </a:t>
+            </a:r>
+            <a:r>
+              <a:rPr sz="1600" b="1" i="0">
+                <a:solidFill>
+                  <a:srgbClr val="FFFFFF"/>
+                </a:solidFill>
+                <a:latin typeface="Arial"/>
+              </a:rPr>
+              <a:t>Безопасность.  </a:t>
+            </a:r>
+            <a:r>
+              <a:rPr sz="1500" b="0" i="0">
+                <a:solidFill>
+                  <a:srgbClr val="8B9AB8"/>
+                </a:solidFill>
+                <a:latin typeface="Arial"/>
+              </a:rPr>
+              <a:t>Экипировка, зонирование, тренер и медпункт.</a:t>
+            </a:r>
+          </a:p>
+          <a:p>
+            <a:pPr>
+              <a:spcBef>
+                <a:spcPts val="0"/>
+              </a:spcBef>
+              <a:spcAft>
+                <a:spcPts val="1100"/>
+              </a:spcAft>
+            </a:pPr>
+            <a:r>
+              <a:rPr sz="1300" b="1" i="0">
+                <a:solidFill>
+                  <a:srgbClr val="FF5722"/>
+                </a:solidFill>
+                <a:latin typeface="Arial"/>
+              </a:rPr>
+              <a:t>●  </a:t>
+            </a:r>
+            <a:r>
+              <a:rPr sz="1600" b="1" i="0">
+                <a:solidFill>
+                  <a:srgbClr val="FFFFFF"/>
+                </a:solidFill>
+                <a:latin typeface="Arial"/>
+              </a:rPr>
+              <a:t>Социальная польза.  </a:t>
+            </a:r>
+            <a:r>
+              <a:rPr sz="1500" b="0" i="0">
+                <a:solidFill>
+                  <a:srgbClr val="8B9AB8"/>
+                </a:solidFill>
+                <a:latin typeface="Arial"/>
+              </a:rPr>
+              <a:t>Здоровый досуг и меньше уличных рисков.</a:t>
+            </a:r>
+          </a:p>
+          <a:p>
+            <a:pPr>
+              <a:spcBef>
+                <a:spcPts val="0"/>
+              </a:spcBef>
+              <a:spcAft>
+                <a:spcPts val="1100"/>
+              </a:spcAft>
+            </a:pPr>
+            <a:r>
+              <a:rPr sz="1300" b="1" i="0">
+                <a:solidFill>
+                  <a:srgbClr val="FF5722"/>
+                </a:solidFill>
+                <a:latin typeface="Arial"/>
+              </a:rPr>
+              <a:t>●  </a:t>
+            </a:r>
+            <a:r>
+              <a:rPr sz="1600" b="1" i="0">
+                <a:solidFill>
+                  <a:srgbClr val="FFFFFF"/>
+                </a:solidFill>
+                <a:latin typeface="Arial"/>
+              </a:rPr>
+              <a:t>Доход в бюджет.  </a:t>
+            </a:r>
+            <a:r>
+              <a:rPr sz="1500" b="0" i="0">
+                <a:solidFill>
+                  <a:srgbClr val="8B9AB8"/>
+                </a:solidFill>
+                <a:latin typeface="Arial"/>
+              </a:rPr>
+              <a:t>Торговля инвентарём и налоги в казну города.</a:t>
+            </a:r>
+          </a:p>
+        </p:txBody>
+      </p:sp>
+      <p:pic>
+        <p:nvPicPr>
+          <p:cNvPr id="7" name="Picture 6" descr="plus.png"/>
+          <p:cNvPicPr>
+            <a:picLocks noChangeAspect="1"/>
+          </p:cNvPicPr>
+          <p:nvPr/>
+        </p:nvPicPr>
+        <p:blipFill>
+          <a:blip r:embed="rId2"/>
+          <a:stretch>
+            <a:fillRect/>
+          </a:stretch>
+        </p:blipFill>
+        <p:spPr>
+          <a:xfrm>
+            <a:off x="6355080" y="1874519"/>
+            <a:ext cx="5212080" cy="3350622"/>
+          </a:xfrm>
+          <a:prstGeom prst="rect">
+            <a:avLst/>
+          </a:prstGeom>
+          <a:ln w="15875">
             <a:solidFill>
               <a:srgbClr val="243150"/>
             </a:solidFill>
           </a:ln>
-          <a:effectLst/>
-        </p:spPr>
-        <p:style>
-          <a:lnRef idx="1">
-            <a:schemeClr val="accent1"/>
-          </a:lnRef>
-          <a:fillRef idx="3">
-            <a:schemeClr val="accent1"/>
-          </a:fillRef>
-          <a:effectRef idx="2">
-            <a:schemeClr val="accent1"/>
-          </a:effectRef>
-          <a:fontRef idx="minor">
-            <a:schemeClr val="lt1"/>
-          </a:fontRef>
-        </p:style>
-        <p:txBody>
-          <a:bodyPr rtlCol="0" anchor="ctr" wrap="square" lIns="201168" rIns="201168" tIns="182880" bIns="182880"/>
-          <a:lstStyle/>
-          <a:p>
-            <a:pPr algn="l">
-              <a:spcAft>
-                <a:spcPts val="400"/>
-              </a:spcAft>
-            </a:pPr>
-            <a:r>
-              <a:rPr sz="3000" b="0" i="0">
-                <a:solidFill>
-                  <a:srgbClr val="FFC107"/>
-                </a:solidFill>
-                <a:latin typeface="Arial"/>
-              </a:rPr>
-              <a:t>◈</a:t>
-            </a:r>
-          </a:p>
-          <a:p>
-            <a:pPr algn="l">
-              <a:spcAft>
-                <a:spcPts val="500"/>
-              </a:spcAft>
-            </a:pPr>
-            <a:r>
-              <a:rPr sz="1700" b="1" i="0">
-                <a:solidFill>
-                  <a:srgbClr val="FFFFFF"/>
-                </a:solidFill>
-                <a:latin typeface="Arial"/>
-              </a:rPr>
-              <a:t>Безопасность</a:t>
-            </a:r>
-          </a:p>
-          <a:p>
-            <a:pPr algn="l">
-              <a:spcAft>
-                <a:spcPts val="0"/>
-              </a:spcAft>
-            </a:pPr>
-            <a:r>
-              <a:rPr sz="1250" b="0" i="0">
-                <a:solidFill>
-                  <a:srgbClr val="8B9AB8"/>
-                </a:solidFill>
-                <a:latin typeface="Arial"/>
-              </a:rPr>
-              <a:t>Экипировка, зонирование, тренер и медпункт.</a:t>
-            </a:r>
-          </a:p>
-        </p:txBody>
-      </p:sp>
-      <p:sp>
-        <p:nvSpPr>
-          <p:cNvPr id="7" name="Rounded Rectangle 6"/>
-          <p:cNvSpPr/>
-          <p:nvPr/>
-        </p:nvSpPr>
-        <p:spPr>
-          <a:xfrm>
-            <a:off x="777240" y="4572000"/>
-            <a:ext cx="5175504" cy="1645920"/>
-          </a:xfrm>
-          <a:prstGeom prst="roundRect">
-            <a:avLst>
-              <a:gd name="adj" fmla="val 6000"/>
-            </a:avLst>
-          </a:prstGeom>
-          <a:solidFill>
-            <a:srgbClr val="141D33"/>
-          </a:solidFill>
-          <a:ln w="12700">
-            <a:solidFill>
-              <a:srgbClr val="243150"/>
-            </a:solidFill>
-          </a:ln>
-          <a:effectLst/>
-        </p:spPr>
-        <p:style>
-          <a:lnRef idx="1">
-            <a:schemeClr val="accent1"/>
-          </a:lnRef>
-          <a:fillRef idx="3">
-            <a:schemeClr val="accent1"/>
-          </a:fillRef>
-          <a:effectRef idx="2">
-            <a:schemeClr val="accent1"/>
-          </a:effectRef>
-          <a:fontRef idx="minor">
-            <a:schemeClr val="lt1"/>
-          </a:fontRef>
-        </p:style>
-        <p:txBody>
-          <a:bodyPr rtlCol="0" anchor="ctr" wrap="square" lIns="201168" rIns="201168" tIns="182880" bIns="182880"/>
-          <a:lstStyle/>
-          <a:p>
-            <a:pPr algn="l">
-              <a:spcAft>
-                <a:spcPts val="400"/>
-              </a:spcAft>
-            </a:pPr>
-            <a:r>
-              <a:rPr sz="3000" b="0" i="0">
-                <a:solidFill>
-                  <a:srgbClr val="FFC107"/>
-                </a:solidFill>
-                <a:latin typeface="Arial"/>
-              </a:rPr>
-              <a:t>♥</a:t>
-            </a:r>
-          </a:p>
-          <a:p>
-            <a:pPr algn="l">
-              <a:spcAft>
-                <a:spcPts val="500"/>
-              </a:spcAft>
-            </a:pPr>
-            <a:r>
-              <a:rPr sz="1700" b="1" i="0">
-                <a:solidFill>
-                  <a:srgbClr val="FFFFFF"/>
-                </a:solidFill>
-                <a:latin typeface="Arial"/>
-              </a:rPr>
-              <a:t>Социальная польза</a:t>
-            </a:r>
-          </a:p>
-          <a:p>
-            <a:pPr algn="l">
-              <a:spcAft>
-                <a:spcPts val="0"/>
-              </a:spcAft>
-            </a:pPr>
-            <a:r>
-              <a:rPr sz="1250" b="0" i="0">
-                <a:solidFill>
-                  <a:srgbClr val="8B9AB8"/>
-                </a:solidFill>
-                <a:latin typeface="Arial"/>
-              </a:rPr>
-              <a:t>Здоровый досуг и меньше уличных рисков.</a:t>
-            </a:r>
-          </a:p>
-        </p:txBody>
-      </p:sp>
-      <p:sp>
-        <p:nvSpPr>
-          <p:cNvPr id="8" name="Rounded Rectangle 7"/>
-          <p:cNvSpPr/>
-          <p:nvPr/>
-        </p:nvSpPr>
-        <p:spPr>
-          <a:xfrm>
-            <a:off x="6135624" y="4572000"/>
-            <a:ext cx="5175504" cy="1645920"/>
-          </a:xfrm>
-          <a:prstGeom prst="roundRect">
-            <a:avLst>
-              <a:gd name="adj" fmla="val 6000"/>
-            </a:avLst>
-          </a:prstGeom>
-          <a:solidFill>
-            <a:srgbClr val="141D33"/>
-          </a:solidFill>
-          <a:ln w="12700">
-            <a:solidFill>
-              <a:srgbClr val="243150"/>
-            </a:solidFill>
-          </a:ln>
-          <a:effectLst/>
-        </p:spPr>
-        <p:style>
-          <a:lnRef idx="1">
-            <a:schemeClr val="accent1"/>
-          </a:lnRef>
-          <a:fillRef idx="3">
-            <a:schemeClr val="accent1"/>
-          </a:fillRef>
-          <a:effectRef idx="2">
-            <a:schemeClr val="accent1"/>
-          </a:effectRef>
-          <a:fontRef idx="minor">
-            <a:schemeClr val="lt1"/>
-          </a:fontRef>
-        </p:style>
-        <p:txBody>
-          <a:bodyPr rtlCol="0" anchor="ctr" wrap="square" lIns="201168" rIns="201168" tIns="182880" bIns="182880"/>
-          <a:lstStyle/>
-          <a:p>
-            <a:pPr algn="l">
-              <a:spcAft>
-                <a:spcPts val="400"/>
-              </a:spcAft>
-            </a:pPr>
-            <a:r>
-              <a:rPr sz="3000" b="0" i="0">
-                <a:solidFill>
-                  <a:srgbClr val="FFC107"/>
-                </a:solidFill>
-                <a:latin typeface="Arial"/>
-              </a:rPr>
-              <a:t>₽</a:t>
-            </a:r>
-          </a:p>
-          <a:p>
-            <a:pPr algn="l">
-              <a:spcAft>
-                <a:spcPts val="500"/>
-              </a:spcAft>
-            </a:pPr>
-            <a:r>
-              <a:rPr sz="1700" b="1" i="0">
-                <a:solidFill>
-                  <a:srgbClr val="FFFFFF"/>
-                </a:solidFill>
-                <a:latin typeface="Arial"/>
-              </a:rPr>
-              <a:t>Доход в бюджет</a:t>
-            </a:r>
-          </a:p>
-          <a:p>
-            <a:pPr algn="l">
-              <a:spcAft>
-                <a:spcPts val="0"/>
-              </a:spcAft>
-            </a:pPr>
-            <a:r>
-              <a:rPr sz="1250" b="0" i="0">
-                <a:solidFill>
-                  <a:srgbClr val="8B9AB8"/>
-                </a:solidFill>
-                <a:latin typeface="Arial"/>
-              </a:rPr>
-              <a:t>Торговля инвентарём и налоги в казну города.</a:t>
-            </a:r>
-          </a:p>
-        </p:txBody>
-      </p:sp>
+        </p:spPr>
+      </p:pic>
     </p:spTree>
   </p:cSld>
   <p:clrMapOvr>
